--- a/wada-tue-scoping-review/manuscripts/individual_figures/fig3_timeline.pptx
+++ b/wada-tue-scoping-review/manuscripts/individual_figures/fig3_timeline.pptx
@@ -5,9 +5,9 @@
     <p:sldMasterId id="2147483648" r:id="rId1"/>
   </p:sldMasterIdLst>
   <p:sldIdLst>
-    <p:sldId id="256" r:id="rId7"/>
+    <p:sldId id="256" r:id="rId2"/>
   </p:sldIdLst>
-  <p:sldSz cx="12191695" cy="6858000" type="screen4x3"/>
+  <p:sldSz cx="12192000" cy="6858000"/>
   <p:notesSz cx="6858000" cy="9144000"/>
   <p:defaultTextStyle>
     <a:defPPr>
@@ -104,6 +104,22 @@
       </a:defRPr>
     </a:lvl9pPr>
   </p:defaultTextStyle>
+  <p:extLst>
+    <p:ext uri="{EFAFB233-063F-42B5-8137-9DF3F51BA10A}">
+      <p15:sldGuideLst xmlns:p15="http://schemas.microsoft.com/office/powerpoint/2012/main">
+        <p15:guide id="1" orient="horz" pos="2160">
+          <p15:clr>
+            <a:srgbClr val="A4A3A4"/>
+          </p15:clr>
+        </p15:guide>
+        <p15:guide id="2" pos="2880">
+          <p15:clr>
+            <a:srgbClr val="A4A3A4"/>
+          </p15:clr>
+        </p15:guide>
+      </p15:sldGuideLst>
+    </p:ext>
+  </p:extLst>
 </p:presentation>
 </file>
 
@@ -145,10 +161,9 @@
           <a:lstStyle/>
           <a:p>
             <a:r>
-              <a:rPr lang="en-US" smtClean="0"/>
+              <a:rPr lang="en-US"/>
               <a:t>Click to edit Master title style</a:t>
             </a:r>
-            <a:endParaRPr lang="en-US"/>
           </a:p>
         </p:txBody>
       </p:sp>
@@ -264,10 +279,9 @@
           </a:lstStyle>
           <a:p>
             <a:r>
-              <a:rPr lang="en-US" smtClean="0"/>
+              <a:rPr lang="en-US"/>
               <a:t>Click to edit Master subtitle style</a:t>
             </a:r>
-            <a:endParaRPr lang="en-US"/>
           </a:p>
         </p:txBody>
       </p:sp>
@@ -288,7 +302,7 @@
           <a:p>
             <a:fld id="{5BCAD085-E8A6-8845-BD4E-CB4CCA059FC4}" type="datetimeFigureOut">
               <a:rPr lang="en-US" smtClean="0"/>
-              <a:t>1/27/13</a:t>
+              <a:t>5/9/2026</a:t>
             </a:fld>
             <a:endParaRPr lang="en-US"/>
           </a:p>
@@ -382,10 +396,9 @@
           <a:lstStyle/>
           <a:p>
             <a:r>
-              <a:rPr lang="en-US" smtClean="0"/>
+              <a:rPr lang="en-US"/>
               <a:t>Click to edit Master title style</a:t>
             </a:r>
-            <a:endParaRPr lang="en-US"/>
           </a:p>
         </p:txBody>
       </p:sp>
@@ -406,38 +419,37 @@
           <a:p>
             <a:pPr lvl="0"/>
             <a:r>
-              <a:rPr lang="en-US" smtClean="0"/>
+              <a:rPr lang="en-US"/>
               <a:t>Click to edit Master text styles</a:t>
             </a:r>
           </a:p>
           <a:p>
             <a:pPr lvl="1"/>
             <a:r>
-              <a:rPr lang="en-US" smtClean="0"/>
+              <a:rPr lang="en-US"/>
               <a:t>Second level</a:t>
             </a:r>
           </a:p>
           <a:p>
             <a:pPr lvl="2"/>
             <a:r>
-              <a:rPr lang="en-US" smtClean="0"/>
+              <a:rPr lang="en-US"/>
               <a:t>Third level</a:t>
             </a:r>
           </a:p>
           <a:p>
             <a:pPr lvl="3"/>
             <a:r>
-              <a:rPr lang="en-US" smtClean="0"/>
+              <a:rPr lang="en-US"/>
               <a:t>Fourth level</a:t>
             </a:r>
           </a:p>
           <a:p>
             <a:pPr lvl="4"/>
             <a:r>
-              <a:rPr lang="en-US" smtClean="0"/>
+              <a:rPr lang="en-US"/>
               <a:t>Fifth level</a:t>
             </a:r>
-            <a:endParaRPr lang="en-US"/>
           </a:p>
         </p:txBody>
       </p:sp>
@@ -458,7 +470,7 @@
           <a:p>
             <a:fld id="{5BCAD085-E8A6-8845-BD4E-CB4CCA059FC4}" type="datetimeFigureOut">
               <a:rPr lang="en-US" smtClean="0"/>
-              <a:t>1/27/13</a:t>
+              <a:t>5/9/2026</a:t>
             </a:fld>
             <a:endParaRPr lang="en-US"/>
           </a:p>
@@ -557,10 +569,9 @@
           <a:lstStyle/>
           <a:p>
             <a:r>
-              <a:rPr lang="en-US" smtClean="0"/>
+              <a:rPr lang="en-US"/>
               <a:t>Click to edit Master title style</a:t>
             </a:r>
-            <a:endParaRPr lang="en-US"/>
           </a:p>
         </p:txBody>
       </p:sp>
@@ -586,38 +597,37 @@
           <a:p>
             <a:pPr lvl="0"/>
             <a:r>
-              <a:rPr lang="en-US" smtClean="0"/>
+              <a:rPr lang="en-US"/>
               <a:t>Click to edit Master text styles</a:t>
             </a:r>
           </a:p>
           <a:p>
             <a:pPr lvl="1"/>
             <a:r>
-              <a:rPr lang="en-US" smtClean="0"/>
+              <a:rPr lang="en-US"/>
               <a:t>Second level</a:t>
             </a:r>
           </a:p>
           <a:p>
             <a:pPr lvl="2"/>
             <a:r>
-              <a:rPr lang="en-US" smtClean="0"/>
+              <a:rPr lang="en-US"/>
               <a:t>Third level</a:t>
             </a:r>
           </a:p>
           <a:p>
             <a:pPr lvl="3"/>
             <a:r>
-              <a:rPr lang="en-US" smtClean="0"/>
+              <a:rPr lang="en-US"/>
               <a:t>Fourth level</a:t>
             </a:r>
           </a:p>
           <a:p>
             <a:pPr lvl="4"/>
             <a:r>
-              <a:rPr lang="en-US" smtClean="0"/>
+              <a:rPr lang="en-US"/>
               <a:t>Fifth level</a:t>
             </a:r>
-            <a:endParaRPr lang="en-US"/>
           </a:p>
         </p:txBody>
       </p:sp>
@@ -638,7 +648,7 @@
           <a:p>
             <a:fld id="{5BCAD085-E8A6-8845-BD4E-CB4CCA059FC4}" type="datetimeFigureOut">
               <a:rPr lang="en-US" smtClean="0"/>
-              <a:t>1/27/13</a:t>
+              <a:t>5/9/2026</a:t>
             </a:fld>
             <a:endParaRPr lang="en-US"/>
           </a:p>
@@ -732,10 +742,9 @@
           <a:lstStyle/>
           <a:p>
             <a:r>
-              <a:rPr lang="en-US" smtClean="0"/>
+              <a:rPr lang="en-US"/>
               <a:t>Click to edit Master title style</a:t>
             </a:r>
-            <a:endParaRPr lang="en-US"/>
           </a:p>
         </p:txBody>
       </p:sp>
@@ -756,38 +765,37 @@
           <a:p>
             <a:pPr lvl="0"/>
             <a:r>
-              <a:rPr lang="en-US" smtClean="0"/>
+              <a:rPr lang="en-US"/>
               <a:t>Click to edit Master text styles</a:t>
             </a:r>
           </a:p>
           <a:p>
             <a:pPr lvl="1"/>
             <a:r>
-              <a:rPr lang="en-US" smtClean="0"/>
+              <a:rPr lang="en-US"/>
               <a:t>Second level</a:t>
             </a:r>
           </a:p>
           <a:p>
             <a:pPr lvl="2"/>
             <a:r>
-              <a:rPr lang="en-US" smtClean="0"/>
+              <a:rPr lang="en-US"/>
               <a:t>Third level</a:t>
             </a:r>
           </a:p>
           <a:p>
             <a:pPr lvl="3"/>
             <a:r>
-              <a:rPr lang="en-US" smtClean="0"/>
+              <a:rPr lang="en-US"/>
               <a:t>Fourth level</a:t>
             </a:r>
           </a:p>
           <a:p>
             <a:pPr lvl="4"/>
             <a:r>
-              <a:rPr lang="en-US" smtClean="0"/>
+              <a:rPr lang="en-US"/>
               <a:t>Fifth level</a:t>
             </a:r>
-            <a:endParaRPr lang="en-US"/>
           </a:p>
         </p:txBody>
       </p:sp>
@@ -808,7 +816,7 @@
           <a:p>
             <a:fld id="{5BCAD085-E8A6-8845-BD4E-CB4CCA059FC4}" type="datetimeFigureOut">
               <a:rPr lang="en-US" smtClean="0"/>
-              <a:t>1/27/13</a:t>
+              <a:t>5/9/2026</a:t>
             </a:fld>
             <a:endParaRPr lang="en-US"/>
           </a:p>
@@ -911,10 +919,9 @@
           </a:lstStyle>
           <a:p>
             <a:r>
-              <a:rPr lang="en-US" smtClean="0"/>
+              <a:rPr lang="en-US"/>
               <a:t>Click to edit Master title style</a:t>
             </a:r>
-            <a:endParaRPr lang="en-US"/>
           </a:p>
         </p:txBody>
       </p:sp>
@@ -1031,7 +1038,7 @@
           <a:p>
             <a:pPr lvl="0"/>
             <a:r>
-              <a:rPr lang="en-US" smtClean="0"/>
+              <a:rPr lang="en-US"/>
               <a:t>Click to edit Master text styles</a:t>
             </a:r>
           </a:p>
@@ -1054,7 +1061,7 @@
           <a:p>
             <a:fld id="{5BCAD085-E8A6-8845-BD4E-CB4CCA059FC4}" type="datetimeFigureOut">
               <a:rPr lang="en-US" smtClean="0"/>
-              <a:t>1/27/13</a:t>
+              <a:t>5/9/2026</a:t>
             </a:fld>
             <a:endParaRPr lang="en-US"/>
           </a:p>
@@ -1148,10 +1155,9 @@
           <a:lstStyle/>
           <a:p>
             <a:r>
-              <a:rPr lang="en-US" smtClean="0"/>
+              <a:rPr lang="en-US"/>
               <a:t>Click to edit Master title style</a:t>
             </a:r>
-            <a:endParaRPr lang="en-US"/>
           </a:p>
         </p:txBody>
       </p:sp>
@@ -1205,38 +1211,37 @@
           <a:p>
             <a:pPr lvl="0"/>
             <a:r>
-              <a:rPr lang="en-US" smtClean="0"/>
+              <a:rPr lang="en-US"/>
               <a:t>Click to edit Master text styles</a:t>
             </a:r>
           </a:p>
           <a:p>
             <a:pPr lvl="1"/>
             <a:r>
-              <a:rPr lang="en-US" smtClean="0"/>
+              <a:rPr lang="en-US"/>
               <a:t>Second level</a:t>
             </a:r>
           </a:p>
           <a:p>
             <a:pPr lvl="2"/>
             <a:r>
-              <a:rPr lang="en-US" smtClean="0"/>
+              <a:rPr lang="en-US"/>
               <a:t>Third level</a:t>
             </a:r>
           </a:p>
           <a:p>
             <a:pPr lvl="3"/>
             <a:r>
-              <a:rPr lang="en-US" smtClean="0"/>
+              <a:rPr lang="en-US"/>
               <a:t>Fourth level</a:t>
             </a:r>
           </a:p>
           <a:p>
             <a:pPr lvl="4"/>
             <a:r>
-              <a:rPr lang="en-US" smtClean="0"/>
+              <a:rPr lang="en-US"/>
               <a:t>Fifth level</a:t>
             </a:r>
-            <a:endParaRPr lang="en-US"/>
           </a:p>
         </p:txBody>
       </p:sp>
@@ -1290,38 +1295,37 @@
           <a:p>
             <a:pPr lvl="0"/>
             <a:r>
-              <a:rPr lang="en-US" smtClean="0"/>
+              <a:rPr lang="en-US"/>
               <a:t>Click to edit Master text styles</a:t>
             </a:r>
           </a:p>
           <a:p>
             <a:pPr lvl="1"/>
             <a:r>
-              <a:rPr lang="en-US" smtClean="0"/>
+              <a:rPr lang="en-US"/>
               <a:t>Second level</a:t>
             </a:r>
           </a:p>
           <a:p>
             <a:pPr lvl="2"/>
             <a:r>
-              <a:rPr lang="en-US" smtClean="0"/>
+              <a:rPr lang="en-US"/>
               <a:t>Third level</a:t>
             </a:r>
           </a:p>
           <a:p>
             <a:pPr lvl="3"/>
             <a:r>
-              <a:rPr lang="en-US" smtClean="0"/>
+              <a:rPr lang="en-US"/>
               <a:t>Fourth level</a:t>
             </a:r>
           </a:p>
           <a:p>
             <a:pPr lvl="4"/>
             <a:r>
-              <a:rPr lang="en-US" smtClean="0"/>
+              <a:rPr lang="en-US"/>
               <a:t>Fifth level</a:t>
             </a:r>
-            <a:endParaRPr lang="en-US"/>
           </a:p>
         </p:txBody>
       </p:sp>
@@ -1342,7 +1346,7 @@
           <a:p>
             <a:fld id="{5BCAD085-E8A6-8845-BD4E-CB4CCA059FC4}" type="datetimeFigureOut">
               <a:rPr lang="en-US" smtClean="0"/>
-              <a:t>1/27/13</a:t>
+              <a:t>5/9/2026</a:t>
             </a:fld>
             <a:endParaRPr lang="en-US"/>
           </a:p>
@@ -1440,10 +1444,9 @@
           </a:lstStyle>
           <a:p>
             <a:r>
-              <a:rPr lang="en-US" smtClean="0"/>
+              <a:rPr lang="en-US"/>
               <a:t>Click to edit Master title style</a:t>
             </a:r>
-            <a:endParaRPr lang="en-US"/>
           </a:p>
         </p:txBody>
       </p:sp>
@@ -1506,7 +1509,7 @@
           <a:p>
             <a:pPr lvl="0"/>
             <a:r>
-              <a:rPr lang="en-US" smtClean="0"/>
+              <a:rPr lang="en-US"/>
               <a:t>Click to edit Master text styles</a:t>
             </a:r>
           </a:p>
@@ -1562,38 +1565,37 @@
           <a:p>
             <a:pPr lvl="0"/>
             <a:r>
-              <a:rPr lang="en-US" smtClean="0"/>
+              <a:rPr lang="en-US"/>
               <a:t>Click to edit Master text styles</a:t>
             </a:r>
           </a:p>
           <a:p>
             <a:pPr lvl="1"/>
             <a:r>
-              <a:rPr lang="en-US" smtClean="0"/>
+              <a:rPr lang="en-US"/>
               <a:t>Second level</a:t>
             </a:r>
           </a:p>
           <a:p>
             <a:pPr lvl="2"/>
             <a:r>
-              <a:rPr lang="en-US" smtClean="0"/>
+              <a:rPr lang="en-US"/>
               <a:t>Third level</a:t>
             </a:r>
           </a:p>
           <a:p>
             <a:pPr lvl="3"/>
             <a:r>
-              <a:rPr lang="en-US" smtClean="0"/>
+              <a:rPr lang="en-US"/>
               <a:t>Fourth level</a:t>
             </a:r>
           </a:p>
           <a:p>
             <a:pPr lvl="4"/>
             <a:r>
-              <a:rPr lang="en-US" smtClean="0"/>
+              <a:rPr lang="en-US"/>
               <a:t>Fifth level</a:t>
             </a:r>
-            <a:endParaRPr lang="en-US"/>
           </a:p>
         </p:txBody>
       </p:sp>
@@ -1656,7 +1658,7 @@
           <a:p>
             <a:pPr lvl="0"/>
             <a:r>
-              <a:rPr lang="en-US" smtClean="0"/>
+              <a:rPr lang="en-US"/>
               <a:t>Click to edit Master text styles</a:t>
             </a:r>
           </a:p>
@@ -1712,38 +1714,37 @@
           <a:p>
             <a:pPr lvl="0"/>
             <a:r>
-              <a:rPr lang="en-US" smtClean="0"/>
+              <a:rPr lang="en-US"/>
               <a:t>Click to edit Master text styles</a:t>
             </a:r>
           </a:p>
           <a:p>
             <a:pPr lvl="1"/>
             <a:r>
-              <a:rPr lang="en-US" smtClean="0"/>
+              <a:rPr lang="en-US"/>
               <a:t>Second level</a:t>
             </a:r>
           </a:p>
           <a:p>
             <a:pPr lvl="2"/>
             <a:r>
-              <a:rPr lang="en-US" smtClean="0"/>
+              <a:rPr lang="en-US"/>
               <a:t>Third level</a:t>
             </a:r>
           </a:p>
           <a:p>
             <a:pPr lvl="3"/>
             <a:r>
-              <a:rPr lang="en-US" smtClean="0"/>
+              <a:rPr lang="en-US"/>
               <a:t>Fourth level</a:t>
             </a:r>
           </a:p>
           <a:p>
             <a:pPr lvl="4"/>
             <a:r>
-              <a:rPr lang="en-US" smtClean="0"/>
+              <a:rPr lang="en-US"/>
               <a:t>Fifth level</a:t>
             </a:r>
-            <a:endParaRPr lang="en-US"/>
           </a:p>
         </p:txBody>
       </p:sp>
@@ -1764,7 +1765,7 @@
           <a:p>
             <a:fld id="{5BCAD085-E8A6-8845-BD4E-CB4CCA059FC4}" type="datetimeFigureOut">
               <a:rPr lang="en-US" smtClean="0"/>
-              <a:t>1/27/13</a:t>
+              <a:t>5/9/2026</a:t>
             </a:fld>
             <a:endParaRPr lang="en-US"/>
           </a:p>
@@ -1858,10 +1859,9 @@
           <a:lstStyle/>
           <a:p>
             <a:r>
-              <a:rPr lang="en-US" smtClean="0"/>
+              <a:rPr lang="en-US"/>
               <a:t>Click to edit Master title style</a:t>
             </a:r>
-            <a:endParaRPr lang="en-US"/>
           </a:p>
         </p:txBody>
       </p:sp>
@@ -1882,7 +1882,7 @@
           <a:p>
             <a:fld id="{5BCAD085-E8A6-8845-BD4E-CB4CCA059FC4}" type="datetimeFigureOut">
               <a:rPr lang="en-US" smtClean="0"/>
-              <a:t>1/27/13</a:t>
+              <a:t>5/9/2026</a:t>
             </a:fld>
             <a:endParaRPr lang="en-US"/>
           </a:p>
@@ -1977,7 +1977,7 @@
           <a:p>
             <a:fld id="{5BCAD085-E8A6-8845-BD4E-CB4CCA059FC4}" type="datetimeFigureOut">
               <a:rPr lang="en-US" smtClean="0"/>
-              <a:t>1/27/13</a:t>
+              <a:t>5/9/2026</a:t>
             </a:fld>
             <a:endParaRPr lang="en-US"/>
           </a:p>
@@ -2080,10 +2080,9 @@
           </a:lstStyle>
           <a:p>
             <a:r>
-              <a:rPr lang="en-US" smtClean="0"/>
+              <a:rPr lang="en-US"/>
               <a:t>Click to edit Master title style</a:t>
             </a:r>
-            <a:endParaRPr lang="en-US"/>
           </a:p>
         </p:txBody>
       </p:sp>
@@ -2137,38 +2136,37 @@
           <a:p>
             <a:pPr lvl="0"/>
             <a:r>
-              <a:rPr lang="en-US" smtClean="0"/>
+              <a:rPr lang="en-US"/>
               <a:t>Click to edit Master text styles</a:t>
             </a:r>
           </a:p>
           <a:p>
             <a:pPr lvl="1"/>
             <a:r>
-              <a:rPr lang="en-US" smtClean="0"/>
+              <a:rPr lang="en-US"/>
               <a:t>Second level</a:t>
             </a:r>
           </a:p>
           <a:p>
             <a:pPr lvl="2"/>
             <a:r>
-              <a:rPr lang="en-US" smtClean="0"/>
+              <a:rPr lang="en-US"/>
               <a:t>Third level</a:t>
             </a:r>
           </a:p>
           <a:p>
             <a:pPr lvl="3"/>
             <a:r>
-              <a:rPr lang="en-US" smtClean="0"/>
+              <a:rPr lang="en-US"/>
               <a:t>Fourth level</a:t>
             </a:r>
           </a:p>
           <a:p>
             <a:pPr lvl="4"/>
             <a:r>
-              <a:rPr lang="en-US" smtClean="0"/>
+              <a:rPr lang="en-US"/>
               <a:t>Fifth level</a:t>
             </a:r>
-            <a:endParaRPr lang="en-US"/>
           </a:p>
         </p:txBody>
       </p:sp>
@@ -2231,7 +2229,7 @@
           <a:p>
             <a:pPr lvl="0"/>
             <a:r>
-              <a:rPr lang="en-US" smtClean="0"/>
+              <a:rPr lang="en-US"/>
               <a:t>Click to edit Master text styles</a:t>
             </a:r>
           </a:p>
@@ -2254,7 +2252,7 @@
           <a:p>
             <a:fld id="{5BCAD085-E8A6-8845-BD4E-CB4CCA059FC4}" type="datetimeFigureOut">
               <a:rPr lang="en-US" smtClean="0"/>
-              <a:t>1/27/13</a:t>
+              <a:t>5/9/2026</a:t>
             </a:fld>
             <a:endParaRPr lang="en-US"/>
           </a:p>
@@ -2357,10 +2355,9 @@
           </a:lstStyle>
           <a:p>
             <a:r>
-              <a:rPr lang="en-US" smtClean="0"/>
+              <a:rPr lang="en-US"/>
               <a:t>Click to edit Master title style</a:t>
             </a:r>
-            <a:endParaRPr lang="en-US"/>
           </a:p>
         </p:txBody>
       </p:sp>
@@ -2484,7 +2481,7 @@
           <a:p>
             <a:pPr lvl="0"/>
             <a:r>
-              <a:rPr lang="en-US" smtClean="0"/>
+              <a:rPr lang="en-US"/>
               <a:t>Click to edit Master text styles</a:t>
             </a:r>
           </a:p>
@@ -2507,7 +2504,7 @@
           <a:p>
             <a:fld id="{5BCAD085-E8A6-8845-BD4E-CB4CCA059FC4}" type="datetimeFigureOut">
               <a:rPr lang="en-US" smtClean="0"/>
-              <a:t>1/27/13</a:t>
+              <a:t>5/9/2026</a:t>
             </a:fld>
             <a:endParaRPr lang="en-US"/>
           </a:p>
@@ -2616,10 +2613,9 @@
           <a:lstStyle/>
           <a:p>
             <a:r>
-              <a:rPr lang="en-US" smtClean="0"/>
+              <a:rPr lang="en-US"/>
               <a:t>Click to edit Master title style</a:t>
             </a:r>
-            <a:endParaRPr lang="en-US"/>
           </a:p>
         </p:txBody>
       </p:sp>
@@ -2650,38 +2646,37 @@
           <a:p>
             <a:pPr lvl="0"/>
             <a:r>
-              <a:rPr lang="en-US" smtClean="0"/>
+              <a:rPr lang="en-US"/>
               <a:t>Click to edit Master text styles</a:t>
             </a:r>
           </a:p>
           <a:p>
             <a:pPr lvl="1"/>
             <a:r>
-              <a:rPr lang="en-US" smtClean="0"/>
+              <a:rPr lang="en-US"/>
               <a:t>Second level</a:t>
             </a:r>
           </a:p>
           <a:p>
             <a:pPr lvl="2"/>
             <a:r>
-              <a:rPr lang="en-US" smtClean="0"/>
+              <a:rPr lang="en-US"/>
               <a:t>Third level</a:t>
             </a:r>
           </a:p>
           <a:p>
             <a:pPr lvl="3"/>
             <a:r>
-              <a:rPr lang="en-US" smtClean="0"/>
+              <a:rPr lang="en-US"/>
               <a:t>Fourth level</a:t>
             </a:r>
           </a:p>
           <a:p>
             <a:pPr lvl="4"/>
             <a:r>
-              <a:rPr lang="en-US" smtClean="0"/>
+              <a:rPr lang="en-US"/>
               <a:t>Fifth level</a:t>
             </a:r>
-            <a:endParaRPr lang="en-US"/>
           </a:p>
         </p:txBody>
       </p:sp>
@@ -2720,7 +2715,7 @@
           <a:p>
             <a:fld id="{5BCAD085-E8A6-8845-BD4E-CB4CCA059FC4}" type="datetimeFigureOut">
               <a:rPr lang="en-US" smtClean="0"/>
-              <a:t>1/27/13</a:t>
+              <a:t>5/9/2026</a:t>
             </a:fld>
             <a:endParaRPr lang="en-US"/>
           </a:p>
@@ -3079,7 +3074,7 @@
 </file>
 
 <file path=ppt/slides/slide1.xml><?xml version="1.0" encoding="utf-8"?>
-<p:sld xmlns:a="http://schemas.openxmlformats.org/drawingml/2006/main" xmlns:p="http://schemas.openxmlformats.org/presentationml/2006/main" xmlns:r="http://schemas.openxmlformats.org/officeDocument/2006/relationships">
+<p:sld xmlns:a="http://schemas.openxmlformats.org/drawingml/2006/main" xmlns:r="http://schemas.openxmlformats.org/officeDocument/2006/relationships" xmlns:p="http://schemas.openxmlformats.org/presentationml/2006/main">
   <p:cSld>
     <p:spTree>
       <p:nvGrpSpPr>
@@ -3087,17 +3082,103 @@
         <p:cNvGrpSpPr/>
         <p:nvPr/>
       </p:nvGrpSpPr>
-      <p:grpSpPr/>
-      <p:sp>
-        <p:nvSpPr>
-          <p:cNvPr id="2" name="TextBox 1"/>
+      <p:grpSpPr>
+        <a:xfrm>
+          <a:off x="0" y="0"/>
+          <a:ext cx="0" cy="0"/>
+          <a:chOff x="0" y="0"/>
+          <a:chExt cx="0" cy="0"/>
+        </a:xfrm>
+      </p:grpSpPr>
+      <p:cxnSp>
+        <p:nvCxnSpPr>
+          <p:cNvPr id="3" name="Connector 2"/>
+          <p:cNvCxnSpPr/>
+          <p:nvPr/>
+        </p:nvCxnSpPr>
+        <p:spPr>
+          <a:xfrm>
+            <a:off x="1371600" y="3429000"/>
+            <a:ext cx="9601200" cy="0"/>
+          </a:xfrm>
+          <a:prstGeom prst="line">
+            <a:avLst/>
+          </a:prstGeom>
+          <a:ln w="31750">
+            <a:solidFill>
+              <a:srgbClr val="424242"/>
+            </a:solidFill>
+          </a:ln>
+        </p:spPr>
+        <p:style>
+          <a:lnRef idx="2">
+            <a:schemeClr val="accent1"/>
+          </a:lnRef>
+          <a:fillRef idx="0">
+            <a:schemeClr val="accent1"/>
+          </a:fillRef>
+          <a:effectRef idx="1">
+            <a:schemeClr val="accent1"/>
+          </a:effectRef>
+          <a:fontRef idx="minor">
+            <a:schemeClr val="tx1"/>
+          </a:fontRef>
+        </p:style>
+      </p:cxnSp>
+      <p:sp>
+        <p:nvSpPr>
+          <p:cNvPr id="4" name="Oval 3"/>
+          <p:cNvSpPr/>
+          <p:nvPr/>
+        </p:nvSpPr>
+        <p:spPr>
+          <a:xfrm>
+            <a:off x="1499616" y="3374136"/>
+            <a:ext cx="109728" cy="109728"/>
+          </a:xfrm>
+          <a:prstGeom prst="ellipse">
+            <a:avLst/>
+          </a:prstGeom>
+          <a:solidFill>
+            <a:srgbClr val="424242"/>
+          </a:solidFill>
+          <a:ln>
+            <a:noFill/>
+          </a:ln>
+        </p:spPr>
+        <p:style>
+          <a:lnRef idx="1">
+            <a:schemeClr val="accent1"/>
+          </a:lnRef>
+          <a:fillRef idx="3">
+            <a:schemeClr val="accent1"/>
+          </a:fillRef>
+          <a:effectRef idx="2">
+            <a:schemeClr val="accent1"/>
+          </a:effectRef>
+          <a:fontRef idx="minor">
+            <a:schemeClr val="lt1"/>
+          </a:fontRef>
+        </p:style>
+        <p:txBody>
+          <a:bodyPr rtlCol="0" anchor="ctr"/>
+          <a:lstStyle/>
+          <a:p>
+            <a:pPr algn="ctr"/>
+            <a:endParaRPr/>
+          </a:p>
+        </p:txBody>
+      </p:sp>
+      <p:sp>
+        <p:nvSpPr>
+          <p:cNvPr id="5" name="TextBox 4"/>
           <p:cNvSpPr txBox="1"/>
           <p:nvPr/>
         </p:nvSpPr>
         <p:spPr>
           <a:xfrm>
-            <a:off x="457200" y="182880"/>
-            <a:ext cx="11247120" cy="548640"/>
+            <a:off x="1280160" y="3566160"/>
+            <a:ext cx="548640" cy="228600"/>
           </a:xfrm>
           <a:prstGeom prst="rect">
             <a:avLst/>
@@ -3112,46 +3193,70 @@
           <a:p>
             <a:pPr algn="ctr"/>
             <a:r>
-              <a:rPr b="1" sz="2400"/>
-              <a:t>Figure 3</a:t>
-            </a:r>
-          </a:p>
-        </p:txBody>
-      </p:sp>
-      <p:pic>
-        <p:nvPicPr>
-          <p:cNvPr id="3" name="Picture 2" descr="fig3_timeline.png"/>
-          <p:cNvPicPr>
-            <a:picLocks noChangeAspect="1"/>
-          </p:cNvPicPr>
+              <a:rPr sz="800" b="1" i="0">
+                <a:solidFill>
+                  <a:srgbClr val="424242"/>
+                </a:solidFill>
+              </a:rPr>
+              <a:t>2018</a:t>
+            </a:r>
+          </a:p>
+        </p:txBody>
+      </p:sp>
+      <p:sp>
+        <p:nvSpPr>
+          <p:cNvPr id="6" name="Oval 5"/>
+          <p:cNvSpPr/>
           <p:nvPr/>
-        </p:nvPicPr>
-        <p:blipFill>
-          <a:blip r:embed="rId2"/>
-          <a:stretch>
-            <a:fillRect/>
-          </a:stretch>
-        </p:blipFill>
-        <p:spPr>
-          <a:xfrm>
-            <a:off x="1066647" y="914400"/>
-            <a:ext cx="10058400" cy="4278211"/>
-          </a:xfrm>
-          <a:prstGeom prst="rect">
-            <a:avLst/>
-          </a:prstGeom>
-        </p:spPr>
-      </p:pic>
-      <p:sp>
-        <p:nvSpPr>
-          <p:cNvPr id="4" name="TextBox 3"/>
+        </p:nvSpPr>
+        <p:spPr>
+          <a:xfrm>
+            <a:off x="2505456" y="3374136"/>
+            <a:ext cx="109728" cy="109728"/>
+          </a:xfrm>
+          <a:prstGeom prst="ellipse">
+            <a:avLst/>
+          </a:prstGeom>
+          <a:solidFill>
+            <a:srgbClr val="424242"/>
+          </a:solidFill>
+          <a:ln>
+            <a:noFill/>
+          </a:ln>
+        </p:spPr>
+        <p:style>
+          <a:lnRef idx="1">
+            <a:schemeClr val="accent1"/>
+          </a:lnRef>
+          <a:fillRef idx="3">
+            <a:schemeClr val="accent1"/>
+          </a:fillRef>
+          <a:effectRef idx="2">
+            <a:schemeClr val="accent1"/>
+          </a:effectRef>
+          <a:fontRef idx="minor">
+            <a:schemeClr val="lt1"/>
+          </a:fontRef>
+        </p:style>
+        <p:txBody>
+          <a:bodyPr rtlCol="0" anchor="ctr"/>
+          <a:lstStyle/>
+          <a:p>
+            <a:pPr algn="ctr"/>
+            <a:endParaRPr/>
+          </a:p>
+        </p:txBody>
+      </p:sp>
+      <p:sp>
+        <p:nvSpPr>
+          <p:cNvPr id="7" name="TextBox 6"/>
           <p:cNvSpPr txBox="1"/>
           <p:nvPr/>
         </p:nvSpPr>
         <p:spPr>
           <a:xfrm>
-            <a:off x="457200" y="5943600"/>
-            <a:ext cx="11247120" cy="731520"/>
+            <a:off x="2286000" y="3566160"/>
+            <a:ext cx="548640" cy="228600"/>
           </a:xfrm>
           <a:prstGeom prst="rect">
             <a:avLst/>
@@ -3166,8 +3271,2356 @@
           <a:p>
             <a:pPr algn="ctr"/>
             <a:r>
-              <a:rPr sz="1400" i="1"/>
-              <a:t>Figure 3. Timeline of clinical guideline updates versus WADA TUE regulatory changes (2018–2026).</a:t>
+              <a:rPr sz="800" b="1" i="0">
+                <a:solidFill>
+                  <a:srgbClr val="424242"/>
+                </a:solidFill>
+              </a:rPr>
+              <a:t>2019</a:t>
+            </a:r>
+          </a:p>
+        </p:txBody>
+      </p:sp>
+      <p:sp>
+        <p:nvSpPr>
+          <p:cNvPr id="8" name="Oval 7"/>
+          <p:cNvSpPr/>
+          <p:nvPr/>
+        </p:nvSpPr>
+        <p:spPr>
+          <a:xfrm>
+            <a:off x="3511296" y="3374136"/>
+            <a:ext cx="109728" cy="109728"/>
+          </a:xfrm>
+          <a:prstGeom prst="ellipse">
+            <a:avLst/>
+          </a:prstGeom>
+          <a:solidFill>
+            <a:srgbClr val="424242"/>
+          </a:solidFill>
+          <a:ln>
+            <a:noFill/>
+          </a:ln>
+        </p:spPr>
+        <p:style>
+          <a:lnRef idx="1">
+            <a:schemeClr val="accent1"/>
+          </a:lnRef>
+          <a:fillRef idx="3">
+            <a:schemeClr val="accent1"/>
+          </a:fillRef>
+          <a:effectRef idx="2">
+            <a:schemeClr val="accent1"/>
+          </a:effectRef>
+          <a:fontRef idx="minor">
+            <a:schemeClr val="lt1"/>
+          </a:fontRef>
+        </p:style>
+        <p:txBody>
+          <a:bodyPr rtlCol="0" anchor="ctr"/>
+          <a:lstStyle/>
+          <a:p>
+            <a:pPr algn="ctr"/>
+            <a:endParaRPr/>
+          </a:p>
+        </p:txBody>
+      </p:sp>
+      <p:sp>
+        <p:nvSpPr>
+          <p:cNvPr id="9" name="TextBox 8"/>
+          <p:cNvSpPr txBox="1"/>
+          <p:nvPr/>
+        </p:nvSpPr>
+        <p:spPr>
+          <a:xfrm>
+            <a:off x="3291840" y="3566160"/>
+            <a:ext cx="548640" cy="228600"/>
+          </a:xfrm>
+          <a:prstGeom prst="rect">
+            <a:avLst/>
+          </a:prstGeom>
+          <a:noFill/>
+        </p:spPr>
+        <p:txBody>
+          <a:bodyPr wrap="square">
+            <a:spAutoFit/>
+          </a:bodyPr>
+          <a:lstStyle/>
+          <a:p>
+            <a:pPr algn="ctr"/>
+            <a:r>
+              <a:rPr sz="800" b="1" i="0">
+                <a:solidFill>
+                  <a:srgbClr val="424242"/>
+                </a:solidFill>
+              </a:rPr>
+              <a:t>2020</a:t>
+            </a:r>
+          </a:p>
+        </p:txBody>
+      </p:sp>
+      <p:sp>
+        <p:nvSpPr>
+          <p:cNvPr id="10" name="Oval 9"/>
+          <p:cNvSpPr/>
+          <p:nvPr/>
+        </p:nvSpPr>
+        <p:spPr>
+          <a:xfrm>
+            <a:off x="4517136" y="3374136"/>
+            <a:ext cx="109728" cy="109728"/>
+          </a:xfrm>
+          <a:prstGeom prst="ellipse">
+            <a:avLst/>
+          </a:prstGeom>
+          <a:solidFill>
+            <a:srgbClr val="424242"/>
+          </a:solidFill>
+          <a:ln>
+            <a:noFill/>
+          </a:ln>
+        </p:spPr>
+        <p:style>
+          <a:lnRef idx="1">
+            <a:schemeClr val="accent1"/>
+          </a:lnRef>
+          <a:fillRef idx="3">
+            <a:schemeClr val="accent1"/>
+          </a:fillRef>
+          <a:effectRef idx="2">
+            <a:schemeClr val="accent1"/>
+          </a:effectRef>
+          <a:fontRef idx="minor">
+            <a:schemeClr val="lt1"/>
+          </a:fontRef>
+        </p:style>
+        <p:txBody>
+          <a:bodyPr rtlCol="0" anchor="ctr"/>
+          <a:lstStyle/>
+          <a:p>
+            <a:pPr algn="ctr"/>
+            <a:endParaRPr/>
+          </a:p>
+        </p:txBody>
+      </p:sp>
+      <p:sp>
+        <p:nvSpPr>
+          <p:cNvPr id="11" name="TextBox 10"/>
+          <p:cNvSpPr txBox="1"/>
+          <p:nvPr/>
+        </p:nvSpPr>
+        <p:spPr>
+          <a:xfrm>
+            <a:off x="4297680" y="3566160"/>
+            <a:ext cx="548640" cy="228600"/>
+          </a:xfrm>
+          <a:prstGeom prst="rect">
+            <a:avLst/>
+          </a:prstGeom>
+          <a:noFill/>
+        </p:spPr>
+        <p:txBody>
+          <a:bodyPr wrap="square">
+            <a:spAutoFit/>
+          </a:bodyPr>
+          <a:lstStyle/>
+          <a:p>
+            <a:pPr algn="ctr"/>
+            <a:r>
+              <a:rPr sz="800" b="1" i="0">
+                <a:solidFill>
+                  <a:srgbClr val="424242"/>
+                </a:solidFill>
+              </a:rPr>
+              <a:t>2021</a:t>
+            </a:r>
+          </a:p>
+        </p:txBody>
+      </p:sp>
+      <p:sp>
+        <p:nvSpPr>
+          <p:cNvPr id="12" name="Oval 11"/>
+          <p:cNvSpPr/>
+          <p:nvPr/>
+        </p:nvSpPr>
+        <p:spPr>
+          <a:xfrm>
+            <a:off x="5522976" y="3374136"/>
+            <a:ext cx="109728" cy="109728"/>
+          </a:xfrm>
+          <a:prstGeom prst="ellipse">
+            <a:avLst/>
+          </a:prstGeom>
+          <a:solidFill>
+            <a:srgbClr val="424242"/>
+          </a:solidFill>
+          <a:ln>
+            <a:noFill/>
+          </a:ln>
+        </p:spPr>
+        <p:style>
+          <a:lnRef idx="1">
+            <a:schemeClr val="accent1"/>
+          </a:lnRef>
+          <a:fillRef idx="3">
+            <a:schemeClr val="accent1"/>
+          </a:fillRef>
+          <a:effectRef idx="2">
+            <a:schemeClr val="accent1"/>
+          </a:effectRef>
+          <a:fontRef idx="minor">
+            <a:schemeClr val="lt1"/>
+          </a:fontRef>
+        </p:style>
+        <p:txBody>
+          <a:bodyPr rtlCol="0" anchor="ctr"/>
+          <a:lstStyle/>
+          <a:p>
+            <a:pPr algn="ctr"/>
+            <a:endParaRPr/>
+          </a:p>
+        </p:txBody>
+      </p:sp>
+      <p:sp>
+        <p:nvSpPr>
+          <p:cNvPr id="13" name="TextBox 12"/>
+          <p:cNvSpPr txBox="1"/>
+          <p:nvPr/>
+        </p:nvSpPr>
+        <p:spPr>
+          <a:xfrm>
+            <a:off x="5303520" y="3566160"/>
+            <a:ext cx="548640" cy="228600"/>
+          </a:xfrm>
+          <a:prstGeom prst="rect">
+            <a:avLst/>
+          </a:prstGeom>
+          <a:noFill/>
+        </p:spPr>
+        <p:txBody>
+          <a:bodyPr wrap="square">
+            <a:spAutoFit/>
+          </a:bodyPr>
+          <a:lstStyle/>
+          <a:p>
+            <a:pPr algn="ctr"/>
+            <a:r>
+              <a:rPr sz="800" b="1" i="0">
+                <a:solidFill>
+                  <a:srgbClr val="424242"/>
+                </a:solidFill>
+              </a:rPr>
+              <a:t>2022</a:t>
+            </a:r>
+          </a:p>
+        </p:txBody>
+      </p:sp>
+      <p:sp>
+        <p:nvSpPr>
+          <p:cNvPr id="14" name="Oval 13"/>
+          <p:cNvSpPr/>
+          <p:nvPr/>
+        </p:nvSpPr>
+        <p:spPr>
+          <a:xfrm>
+            <a:off x="6528816" y="3374136"/>
+            <a:ext cx="109728" cy="109728"/>
+          </a:xfrm>
+          <a:prstGeom prst="ellipse">
+            <a:avLst/>
+          </a:prstGeom>
+          <a:solidFill>
+            <a:srgbClr val="424242"/>
+          </a:solidFill>
+          <a:ln>
+            <a:noFill/>
+          </a:ln>
+        </p:spPr>
+        <p:style>
+          <a:lnRef idx="1">
+            <a:schemeClr val="accent1"/>
+          </a:lnRef>
+          <a:fillRef idx="3">
+            <a:schemeClr val="accent1"/>
+          </a:fillRef>
+          <a:effectRef idx="2">
+            <a:schemeClr val="accent1"/>
+          </a:effectRef>
+          <a:fontRef idx="minor">
+            <a:schemeClr val="lt1"/>
+          </a:fontRef>
+        </p:style>
+        <p:txBody>
+          <a:bodyPr rtlCol="0" anchor="ctr"/>
+          <a:lstStyle/>
+          <a:p>
+            <a:pPr algn="ctr"/>
+            <a:endParaRPr/>
+          </a:p>
+        </p:txBody>
+      </p:sp>
+      <p:sp>
+        <p:nvSpPr>
+          <p:cNvPr id="15" name="TextBox 14"/>
+          <p:cNvSpPr txBox="1"/>
+          <p:nvPr/>
+        </p:nvSpPr>
+        <p:spPr>
+          <a:xfrm>
+            <a:off x="6309360" y="3566160"/>
+            <a:ext cx="548640" cy="228600"/>
+          </a:xfrm>
+          <a:prstGeom prst="rect">
+            <a:avLst/>
+          </a:prstGeom>
+          <a:noFill/>
+        </p:spPr>
+        <p:txBody>
+          <a:bodyPr wrap="square">
+            <a:spAutoFit/>
+          </a:bodyPr>
+          <a:lstStyle/>
+          <a:p>
+            <a:pPr algn="ctr"/>
+            <a:r>
+              <a:rPr sz="800" b="1" i="0">
+                <a:solidFill>
+                  <a:srgbClr val="424242"/>
+                </a:solidFill>
+              </a:rPr>
+              <a:t>2023</a:t>
+            </a:r>
+          </a:p>
+        </p:txBody>
+      </p:sp>
+      <p:sp>
+        <p:nvSpPr>
+          <p:cNvPr id="16" name="Oval 15"/>
+          <p:cNvSpPr/>
+          <p:nvPr/>
+        </p:nvSpPr>
+        <p:spPr>
+          <a:xfrm>
+            <a:off x="7534656" y="3374136"/>
+            <a:ext cx="109728" cy="109728"/>
+          </a:xfrm>
+          <a:prstGeom prst="ellipse">
+            <a:avLst/>
+          </a:prstGeom>
+          <a:solidFill>
+            <a:srgbClr val="424242"/>
+          </a:solidFill>
+          <a:ln>
+            <a:noFill/>
+          </a:ln>
+        </p:spPr>
+        <p:style>
+          <a:lnRef idx="1">
+            <a:schemeClr val="accent1"/>
+          </a:lnRef>
+          <a:fillRef idx="3">
+            <a:schemeClr val="accent1"/>
+          </a:fillRef>
+          <a:effectRef idx="2">
+            <a:schemeClr val="accent1"/>
+          </a:effectRef>
+          <a:fontRef idx="minor">
+            <a:schemeClr val="lt1"/>
+          </a:fontRef>
+        </p:style>
+        <p:txBody>
+          <a:bodyPr rtlCol="0" anchor="ctr"/>
+          <a:lstStyle/>
+          <a:p>
+            <a:pPr algn="ctr"/>
+            <a:endParaRPr/>
+          </a:p>
+        </p:txBody>
+      </p:sp>
+      <p:sp>
+        <p:nvSpPr>
+          <p:cNvPr id="17" name="TextBox 16"/>
+          <p:cNvSpPr txBox="1"/>
+          <p:nvPr/>
+        </p:nvSpPr>
+        <p:spPr>
+          <a:xfrm>
+            <a:off x="7315200" y="3566160"/>
+            <a:ext cx="548640" cy="228600"/>
+          </a:xfrm>
+          <a:prstGeom prst="rect">
+            <a:avLst/>
+          </a:prstGeom>
+          <a:noFill/>
+        </p:spPr>
+        <p:txBody>
+          <a:bodyPr wrap="square">
+            <a:spAutoFit/>
+          </a:bodyPr>
+          <a:lstStyle/>
+          <a:p>
+            <a:pPr algn="ctr"/>
+            <a:r>
+              <a:rPr sz="800" b="1" i="0">
+                <a:solidFill>
+                  <a:srgbClr val="424242"/>
+                </a:solidFill>
+              </a:rPr>
+              <a:t>2024</a:t>
+            </a:r>
+          </a:p>
+        </p:txBody>
+      </p:sp>
+      <p:sp>
+        <p:nvSpPr>
+          <p:cNvPr id="18" name="Oval 17"/>
+          <p:cNvSpPr/>
+          <p:nvPr/>
+        </p:nvSpPr>
+        <p:spPr>
+          <a:xfrm>
+            <a:off x="8540496" y="3374136"/>
+            <a:ext cx="109728" cy="109728"/>
+          </a:xfrm>
+          <a:prstGeom prst="ellipse">
+            <a:avLst/>
+          </a:prstGeom>
+          <a:solidFill>
+            <a:srgbClr val="424242"/>
+          </a:solidFill>
+          <a:ln>
+            <a:noFill/>
+          </a:ln>
+        </p:spPr>
+        <p:style>
+          <a:lnRef idx="1">
+            <a:schemeClr val="accent1"/>
+          </a:lnRef>
+          <a:fillRef idx="3">
+            <a:schemeClr val="accent1"/>
+          </a:fillRef>
+          <a:effectRef idx="2">
+            <a:schemeClr val="accent1"/>
+          </a:effectRef>
+          <a:fontRef idx="minor">
+            <a:schemeClr val="lt1"/>
+          </a:fontRef>
+        </p:style>
+        <p:txBody>
+          <a:bodyPr rtlCol="0" anchor="ctr"/>
+          <a:lstStyle/>
+          <a:p>
+            <a:pPr algn="ctr"/>
+            <a:endParaRPr/>
+          </a:p>
+        </p:txBody>
+      </p:sp>
+      <p:sp>
+        <p:nvSpPr>
+          <p:cNvPr id="19" name="TextBox 18"/>
+          <p:cNvSpPr txBox="1"/>
+          <p:nvPr/>
+        </p:nvSpPr>
+        <p:spPr>
+          <a:xfrm>
+            <a:off x="8321040" y="3566160"/>
+            <a:ext cx="548640" cy="228600"/>
+          </a:xfrm>
+          <a:prstGeom prst="rect">
+            <a:avLst/>
+          </a:prstGeom>
+          <a:noFill/>
+        </p:spPr>
+        <p:txBody>
+          <a:bodyPr wrap="square">
+            <a:spAutoFit/>
+          </a:bodyPr>
+          <a:lstStyle/>
+          <a:p>
+            <a:pPr algn="ctr"/>
+            <a:r>
+              <a:rPr sz="800" b="1" i="0">
+                <a:solidFill>
+                  <a:srgbClr val="424242"/>
+                </a:solidFill>
+              </a:rPr>
+              <a:t>2025</a:t>
+            </a:r>
+          </a:p>
+        </p:txBody>
+      </p:sp>
+      <p:sp>
+        <p:nvSpPr>
+          <p:cNvPr id="20" name="Oval 19"/>
+          <p:cNvSpPr/>
+          <p:nvPr/>
+        </p:nvSpPr>
+        <p:spPr>
+          <a:xfrm>
+            <a:off x="9546336" y="3374136"/>
+            <a:ext cx="109728" cy="109728"/>
+          </a:xfrm>
+          <a:prstGeom prst="ellipse">
+            <a:avLst/>
+          </a:prstGeom>
+          <a:solidFill>
+            <a:srgbClr val="424242"/>
+          </a:solidFill>
+          <a:ln>
+            <a:noFill/>
+          </a:ln>
+        </p:spPr>
+        <p:style>
+          <a:lnRef idx="1">
+            <a:schemeClr val="accent1"/>
+          </a:lnRef>
+          <a:fillRef idx="3">
+            <a:schemeClr val="accent1"/>
+          </a:fillRef>
+          <a:effectRef idx="2">
+            <a:schemeClr val="accent1"/>
+          </a:effectRef>
+          <a:fontRef idx="minor">
+            <a:schemeClr val="lt1"/>
+          </a:fontRef>
+        </p:style>
+        <p:txBody>
+          <a:bodyPr rtlCol="0" anchor="ctr"/>
+          <a:lstStyle/>
+          <a:p>
+            <a:pPr algn="ctr"/>
+            <a:endParaRPr/>
+          </a:p>
+        </p:txBody>
+      </p:sp>
+      <p:sp>
+        <p:nvSpPr>
+          <p:cNvPr id="21" name="TextBox 20"/>
+          <p:cNvSpPr txBox="1"/>
+          <p:nvPr/>
+        </p:nvSpPr>
+        <p:spPr>
+          <a:xfrm>
+            <a:off x="9326880" y="3566160"/>
+            <a:ext cx="548640" cy="228600"/>
+          </a:xfrm>
+          <a:prstGeom prst="rect">
+            <a:avLst/>
+          </a:prstGeom>
+          <a:noFill/>
+        </p:spPr>
+        <p:txBody>
+          <a:bodyPr wrap="square">
+            <a:spAutoFit/>
+          </a:bodyPr>
+          <a:lstStyle/>
+          <a:p>
+            <a:pPr algn="ctr"/>
+            <a:r>
+              <a:rPr sz="800" b="1" i="0">
+                <a:solidFill>
+                  <a:srgbClr val="424242"/>
+                </a:solidFill>
+              </a:rPr>
+              <a:t>2026</a:t>
+            </a:r>
+          </a:p>
+        </p:txBody>
+      </p:sp>
+      <p:sp>
+        <p:nvSpPr>
+          <p:cNvPr id="22" name="TextBox 21"/>
+          <p:cNvSpPr txBox="1"/>
+          <p:nvPr/>
+        </p:nvSpPr>
+        <p:spPr>
+          <a:xfrm>
+            <a:off x="1447485" y="1325880"/>
+            <a:ext cx="1188720" cy="640080"/>
+          </a:xfrm>
+          <a:prstGeom prst="rect">
+            <a:avLst/>
+          </a:prstGeom>
+          <a:noFill/>
+        </p:spPr>
+        <p:txBody>
+          <a:bodyPr wrap="square">
+            <a:spAutoFit/>
+          </a:bodyPr>
+          <a:lstStyle/>
+          <a:p>
+            <a:pPr algn="ctr"/>
+            <a:r>
+              <a:rPr sz="900" b="1" i="0" dirty="0">
+                <a:solidFill>
+                  <a:srgbClr val="1B3A5C"/>
+                </a:solidFill>
+              </a:rPr>
+              <a:t>WADA
+Regulatory
+Updates</a:t>
+            </a:r>
+          </a:p>
+        </p:txBody>
+      </p:sp>
+      <p:sp>
+        <p:nvSpPr>
+          <p:cNvPr id="23" name="Rounded Rectangle 22"/>
+          <p:cNvSpPr/>
+          <p:nvPr/>
+        </p:nvSpPr>
+        <p:spPr>
+          <a:xfrm>
+            <a:off x="5021580" y="1188720"/>
+            <a:ext cx="1371600" cy="502920"/>
+          </a:xfrm>
+          <a:prstGeom prst="roundRect">
+            <a:avLst/>
+          </a:prstGeom>
+          <a:solidFill>
+            <a:srgbClr val="E3F2FD"/>
+          </a:solidFill>
+          <a:ln w="19050">
+            <a:solidFill>
+              <a:srgbClr val="1565C0"/>
+            </a:solidFill>
+          </a:ln>
+        </p:spPr>
+        <p:style>
+          <a:lnRef idx="1">
+            <a:schemeClr val="accent1"/>
+          </a:lnRef>
+          <a:fillRef idx="3">
+            <a:schemeClr val="accent1"/>
+          </a:fillRef>
+          <a:effectRef idx="2">
+            <a:schemeClr val="accent1"/>
+          </a:effectRef>
+          <a:fontRef idx="minor">
+            <a:schemeClr val="lt1"/>
+          </a:fontRef>
+        </p:style>
+        <p:txBody>
+          <a:bodyPr wrap="square" lIns="50800" tIns="38100" rIns="50800" bIns="38100" rtlCol="0" anchor="ctr"/>
+          <a:lstStyle/>
+          <a:p>
+            <a:pPr algn="ctr"/>
+            <a:r>
+              <a:rPr sz="700" b="0">
+                <a:solidFill>
+                  <a:srgbClr val="424242"/>
+                </a:solidFill>
+              </a:rPr>
+              <a:t>GC intra-articular
+prohibited IC</a:t>
+            </a:r>
+          </a:p>
+        </p:txBody>
+      </p:sp>
+      <p:cxnSp>
+        <p:nvCxnSpPr>
+          <p:cNvPr id="24" name="Connector 23"/>
+          <p:cNvCxnSpPr/>
+          <p:nvPr/>
+        </p:nvCxnSpPr>
+        <p:spPr>
+          <a:xfrm>
+            <a:off x="5661660" y="1691640"/>
+            <a:ext cx="0" cy="1664208"/>
+          </a:xfrm>
+          <a:prstGeom prst="line">
+            <a:avLst/>
+          </a:prstGeom>
+          <a:ln w="9525">
+            <a:solidFill>
+              <a:srgbClr val="1565C0"/>
+            </a:solidFill>
+            <a:prstDash val="dash"/>
+          </a:ln>
+        </p:spPr>
+        <p:style>
+          <a:lnRef idx="2">
+            <a:schemeClr val="accent1"/>
+          </a:lnRef>
+          <a:fillRef idx="0">
+            <a:schemeClr val="accent1"/>
+          </a:fillRef>
+          <a:effectRef idx="1">
+            <a:schemeClr val="accent1"/>
+          </a:effectRef>
+          <a:fontRef idx="minor">
+            <a:schemeClr val="tx1"/>
+          </a:fontRef>
+        </p:style>
+      </p:cxnSp>
+      <p:sp>
+        <p:nvSpPr>
+          <p:cNvPr id="25" name="Rounded Rectangle 24"/>
+          <p:cNvSpPr/>
+          <p:nvPr/>
+        </p:nvSpPr>
+        <p:spPr>
+          <a:xfrm>
+            <a:off x="6343519" y="1828800"/>
+            <a:ext cx="1371600" cy="502920"/>
+          </a:xfrm>
+          <a:prstGeom prst="roundRect">
+            <a:avLst/>
+          </a:prstGeom>
+          <a:solidFill>
+            <a:srgbClr val="E3F2FD"/>
+          </a:solidFill>
+          <a:ln w="19050">
+            <a:solidFill>
+              <a:srgbClr val="1565C0"/>
+            </a:solidFill>
+          </a:ln>
+        </p:spPr>
+        <p:style>
+          <a:lnRef idx="1">
+            <a:schemeClr val="accent1"/>
+          </a:lnRef>
+          <a:fillRef idx="3">
+            <a:schemeClr val="accent1"/>
+          </a:fillRef>
+          <a:effectRef idx="2">
+            <a:schemeClr val="accent1"/>
+          </a:effectRef>
+          <a:fontRef idx="minor">
+            <a:schemeClr val="lt1"/>
+          </a:fontRef>
+        </p:style>
+        <p:txBody>
+          <a:bodyPr wrap="square" lIns="50800" tIns="38100" rIns="50800" bIns="38100" rtlCol="0" anchor="ctr"/>
+          <a:lstStyle/>
+          <a:p>
+            <a:pPr algn="ctr"/>
+            <a:r>
+              <a:rPr sz="700" b="0" dirty="0">
+                <a:solidFill>
+                  <a:srgbClr val="424242"/>
+                </a:solidFill>
+              </a:rPr>
+              <a:t>Diabetes TUE
+Guideline v5.1</a:t>
+            </a:r>
+          </a:p>
+        </p:txBody>
+      </p:sp>
+      <p:cxnSp>
+        <p:nvCxnSpPr>
+          <p:cNvPr id="26" name="Connector 25"/>
+          <p:cNvCxnSpPr/>
+          <p:nvPr/>
+        </p:nvCxnSpPr>
+        <p:spPr>
+          <a:xfrm>
+            <a:off x="7421880" y="2331720"/>
+            <a:ext cx="0" cy="1024128"/>
+          </a:xfrm>
+          <a:prstGeom prst="line">
+            <a:avLst/>
+          </a:prstGeom>
+          <a:ln w="9525">
+            <a:solidFill>
+              <a:srgbClr val="1565C0"/>
+            </a:solidFill>
+            <a:prstDash val="dash"/>
+          </a:ln>
+        </p:spPr>
+        <p:style>
+          <a:lnRef idx="2">
+            <a:schemeClr val="accent1"/>
+          </a:lnRef>
+          <a:fillRef idx="0">
+            <a:schemeClr val="accent1"/>
+          </a:fillRef>
+          <a:effectRef idx="1">
+            <a:schemeClr val="accent1"/>
+          </a:effectRef>
+          <a:fontRef idx="minor">
+            <a:schemeClr val="tx1"/>
+          </a:fontRef>
+        </p:style>
+      </p:cxnSp>
+      <p:sp>
+        <p:nvSpPr>
+          <p:cNvPr id="27" name="Rounded Rectangle 26"/>
+          <p:cNvSpPr/>
+          <p:nvPr/>
+        </p:nvSpPr>
+        <p:spPr>
+          <a:xfrm>
+            <a:off x="6781800" y="2468880"/>
+            <a:ext cx="1371600" cy="502920"/>
+          </a:xfrm>
+          <a:prstGeom prst="roundRect">
+            <a:avLst/>
+          </a:prstGeom>
+          <a:solidFill>
+            <a:srgbClr val="E3F2FD"/>
+          </a:solidFill>
+          <a:ln w="19050">
+            <a:solidFill>
+              <a:srgbClr val="1565C0"/>
+            </a:solidFill>
+          </a:ln>
+        </p:spPr>
+        <p:style>
+          <a:lnRef idx="1">
+            <a:schemeClr val="accent1"/>
+          </a:lnRef>
+          <a:fillRef idx="3">
+            <a:schemeClr val="accent1"/>
+          </a:fillRef>
+          <a:effectRef idx="2">
+            <a:schemeClr val="accent1"/>
+          </a:effectRef>
+          <a:fontRef idx="minor">
+            <a:schemeClr val="lt1"/>
+          </a:fontRef>
+        </p:style>
+        <p:txBody>
+          <a:bodyPr wrap="square" lIns="50800" tIns="38100" rIns="50800" bIns="38100" rtlCol="0" anchor="ctr"/>
+          <a:lstStyle/>
+          <a:p>
+            <a:pPr algn="ctr"/>
+            <a:r>
+              <a:rPr sz="700" b="0">
+                <a:solidFill>
+                  <a:srgbClr val="424242"/>
+                </a:solidFill>
+              </a:rPr>
+              <a:t>CV TUE
+Guideline v4.0</a:t>
+            </a:r>
+          </a:p>
+        </p:txBody>
+      </p:sp>
+      <p:cxnSp>
+        <p:nvCxnSpPr>
+          <p:cNvPr id="28" name="Connector 27"/>
+          <p:cNvCxnSpPr/>
+          <p:nvPr/>
+        </p:nvCxnSpPr>
+        <p:spPr>
+          <a:xfrm>
+            <a:off x="7421880" y="2971800"/>
+            <a:ext cx="0" cy="384048"/>
+          </a:xfrm>
+          <a:prstGeom prst="line">
+            <a:avLst/>
+          </a:prstGeom>
+          <a:ln w="9525">
+            <a:solidFill>
+              <a:srgbClr val="1565C0"/>
+            </a:solidFill>
+            <a:prstDash val="dash"/>
+          </a:ln>
+        </p:spPr>
+        <p:style>
+          <a:lnRef idx="2">
+            <a:schemeClr val="accent1"/>
+          </a:lnRef>
+          <a:fillRef idx="0">
+            <a:schemeClr val="accent1"/>
+          </a:fillRef>
+          <a:effectRef idx="1">
+            <a:schemeClr val="accent1"/>
+          </a:effectRef>
+          <a:fontRef idx="minor">
+            <a:schemeClr val="tx1"/>
+          </a:fontRef>
+        </p:style>
+      </p:cxnSp>
+      <p:sp>
+        <p:nvSpPr>
+          <p:cNvPr id="29" name="Rounded Rectangle 28"/>
+          <p:cNvSpPr/>
+          <p:nvPr/>
+        </p:nvSpPr>
+        <p:spPr>
+          <a:xfrm>
+            <a:off x="7033260" y="1188720"/>
+            <a:ext cx="1371600" cy="502920"/>
+          </a:xfrm>
+          <a:prstGeom prst="roundRect">
+            <a:avLst/>
+          </a:prstGeom>
+          <a:solidFill>
+            <a:srgbClr val="E3F2FD"/>
+          </a:solidFill>
+          <a:ln w="19050">
+            <a:solidFill>
+              <a:srgbClr val="1565C0"/>
+            </a:solidFill>
+          </a:ln>
+        </p:spPr>
+        <p:style>
+          <a:lnRef idx="1">
+            <a:schemeClr val="accent1"/>
+          </a:lnRef>
+          <a:fillRef idx="3">
+            <a:schemeClr val="accent1"/>
+          </a:fillRef>
+          <a:effectRef idx="2">
+            <a:schemeClr val="accent1"/>
+          </a:effectRef>
+          <a:fontRef idx="minor">
+            <a:schemeClr val="lt1"/>
+          </a:fontRef>
+        </p:style>
+        <p:txBody>
+          <a:bodyPr wrap="square" lIns="50800" tIns="38100" rIns="50800" bIns="38100" rtlCol="0" anchor="ctr"/>
+          <a:lstStyle/>
+          <a:p>
+            <a:pPr algn="ctr"/>
+            <a:r>
+              <a:rPr sz="700" b="0">
+                <a:solidFill>
+                  <a:srgbClr val="424242"/>
+                </a:solidFill>
+              </a:rPr>
+              <a:t>GLP-1 RA
+Monitoring</a:t>
+            </a:r>
+          </a:p>
+        </p:txBody>
+      </p:sp>
+      <p:cxnSp>
+        <p:nvCxnSpPr>
+          <p:cNvPr id="30" name="Connector 29"/>
+          <p:cNvCxnSpPr/>
+          <p:nvPr/>
+        </p:nvCxnSpPr>
+        <p:spPr>
+          <a:xfrm>
+            <a:off x="7673340" y="1691640"/>
+            <a:ext cx="0" cy="1664208"/>
+          </a:xfrm>
+          <a:prstGeom prst="line">
+            <a:avLst/>
+          </a:prstGeom>
+          <a:ln w="9525">
+            <a:solidFill>
+              <a:srgbClr val="1565C0"/>
+            </a:solidFill>
+            <a:prstDash val="dash"/>
+          </a:ln>
+        </p:spPr>
+        <p:style>
+          <a:lnRef idx="2">
+            <a:schemeClr val="accent1"/>
+          </a:lnRef>
+          <a:fillRef idx="0">
+            <a:schemeClr val="accent1"/>
+          </a:fillRef>
+          <a:effectRef idx="1">
+            <a:schemeClr val="accent1"/>
+          </a:effectRef>
+          <a:fontRef idx="minor">
+            <a:schemeClr val="tx1"/>
+          </a:fontRef>
+        </p:style>
+      </p:cxnSp>
+      <p:sp>
+        <p:nvSpPr>
+          <p:cNvPr id="31" name="Rounded Rectangle 30"/>
+          <p:cNvSpPr/>
+          <p:nvPr/>
+        </p:nvSpPr>
+        <p:spPr>
+          <a:xfrm>
+            <a:off x="7787640" y="1833267"/>
+            <a:ext cx="1371600" cy="502920"/>
+          </a:xfrm>
+          <a:prstGeom prst="roundRect">
+            <a:avLst/>
+          </a:prstGeom>
+          <a:solidFill>
+            <a:srgbClr val="E3F2FD"/>
+          </a:solidFill>
+          <a:ln w="19050">
+            <a:solidFill>
+              <a:srgbClr val="1565C0"/>
+            </a:solidFill>
+          </a:ln>
+        </p:spPr>
+        <p:style>
+          <a:lnRef idx="1">
+            <a:schemeClr val="accent1"/>
+          </a:lnRef>
+          <a:fillRef idx="3">
+            <a:schemeClr val="accent1"/>
+          </a:fillRef>
+          <a:effectRef idx="2">
+            <a:schemeClr val="accent1"/>
+          </a:effectRef>
+          <a:fontRef idx="minor">
+            <a:schemeClr val="lt1"/>
+          </a:fontRef>
+        </p:style>
+        <p:txBody>
+          <a:bodyPr wrap="square" lIns="50800" tIns="38100" rIns="50800" bIns="38100" rtlCol="0" anchor="ctr"/>
+          <a:lstStyle/>
+          <a:p>
+            <a:pPr algn="ctr"/>
+            <a:r>
+              <a:rPr sz="700" b="0">
+                <a:solidFill>
+                  <a:srgbClr val="424242"/>
+                </a:solidFill>
+              </a:rPr>
+              <a:t>PMOS TUE
+Guideline v2.0</a:t>
+            </a:r>
+          </a:p>
+        </p:txBody>
+      </p:sp>
+      <p:cxnSp>
+        <p:nvCxnSpPr>
+          <p:cNvPr id="32" name="Connector 31"/>
+          <p:cNvCxnSpPr/>
+          <p:nvPr/>
+        </p:nvCxnSpPr>
+        <p:spPr>
+          <a:xfrm>
+            <a:off x="8679180" y="2331720"/>
+            <a:ext cx="0" cy="1024128"/>
+          </a:xfrm>
+          <a:prstGeom prst="line">
+            <a:avLst/>
+          </a:prstGeom>
+          <a:ln w="9525">
+            <a:solidFill>
+              <a:srgbClr val="1565C0"/>
+            </a:solidFill>
+            <a:prstDash val="dash"/>
+          </a:ln>
+        </p:spPr>
+        <p:style>
+          <a:lnRef idx="2">
+            <a:schemeClr val="accent1"/>
+          </a:lnRef>
+          <a:fillRef idx="0">
+            <a:schemeClr val="accent1"/>
+          </a:fillRef>
+          <a:effectRef idx="1">
+            <a:schemeClr val="accent1"/>
+          </a:effectRef>
+          <a:fontRef idx="minor">
+            <a:schemeClr val="tx1"/>
+          </a:fontRef>
+        </p:style>
+      </p:cxnSp>
+      <p:sp>
+        <p:nvSpPr>
+          <p:cNvPr id="33" name="Rounded Rectangle 32"/>
+          <p:cNvSpPr/>
+          <p:nvPr/>
+        </p:nvSpPr>
+        <p:spPr>
+          <a:xfrm>
+            <a:off x="8961120" y="2468880"/>
+            <a:ext cx="1371600" cy="502920"/>
+          </a:xfrm>
+          <a:prstGeom prst="roundRect">
+            <a:avLst/>
+          </a:prstGeom>
+          <a:solidFill>
+            <a:srgbClr val="E3F2FD"/>
+          </a:solidFill>
+          <a:ln w="19050">
+            <a:solidFill>
+              <a:srgbClr val="1565C0"/>
+            </a:solidFill>
+          </a:ln>
+        </p:spPr>
+        <p:style>
+          <a:lnRef idx="1">
+            <a:schemeClr val="accent1"/>
+          </a:lnRef>
+          <a:fillRef idx="3">
+            <a:schemeClr val="accent1"/>
+          </a:fillRef>
+          <a:effectRef idx="2">
+            <a:schemeClr val="accent1"/>
+          </a:effectRef>
+          <a:fontRef idx="minor">
+            <a:schemeClr val="lt1"/>
+          </a:fontRef>
+        </p:style>
+        <p:txBody>
+          <a:bodyPr wrap="square" lIns="50800" tIns="38100" rIns="50800" bIns="38100" rtlCol="0" anchor="ctr"/>
+          <a:lstStyle/>
+          <a:p>
+            <a:pPr algn="ctr"/>
+            <a:r>
+              <a:rPr sz="700" b="0">
+                <a:solidFill>
+                  <a:srgbClr val="424242"/>
+                </a:solidFill>
+              </a:rPr>
+              <a:t>Hypogonadism
+TUE update</a:t>
+            </a:r>
+          </a:p>
+        </p:txBody>
+      </p:sp>
+      <p:cxnSp>
+        <p:nvCxnSpPr>
+          <p:cNvPr id="34" name="Connector 33"/>
+          <p:cNvCxnSpPr/>
+          <p:nvPr/>
+        </p:nvCxnSpPr>
+        <p:spPr>
+          <a:xfrm>
+            <a:off x="9601200" y="2971800"/>
+            <a:ext cx="0" cy="384048"/>
+          </a:xfrm>
+          <a:prstGeom prst="line">
+            <a:avLst/>
+          </a:prstGeom>
+          <a:ln w="9525">
+            <a:solidFill>
+              <a:srgbClr val="1565C0"/>
+            </a:solidFill>
+            <a:prstDash val="dash"/>
+          </a:ln>
+        </p:spPr>
+        <p:style>
+          <a:lnRef idx="2">
+            <a:schemeClr val="accent1"/>
+          </a:lnRef>
+          <a:fillRef idx="0">
+            <a:schemeClr val="accent1"/>
+          </a:fillRef>
+          <a:effectRef idx="1">
+            <a:schemeClr val="accent1"/>
+          </a:effectRef>
+          <a:fontRef idx="minor">
+            <a:schemeClr val="tx1"/>
+          </a:fontRef>
+        </p:style>
+      </p:cxnSp>
+      <p:sp>
+        <p:nvSpPr>
+          <p:cNvPr id="35" name="Rounded Rectangle 34"/>
+          <p:cNvSpPr/>
+          <p:nvPr/>
+        </p:nvSpPr>
+        <p:spPr>
+          <a:xfrm>
+            <a:off x="9044940" y="1188720"/>
+            <a:ext cx="1371600" cy="502920"/>
+          </a:xfrm>
+          <a:prstGeom prst="roundRect">
+            <a:avLst/>
+          </a:prstGeom>
+          <a:solidFill>
+            <a:srgbClr val="E3F2FD"/>
+          </a:solidFill>
+          <a:ln w="19050">
+            <a:solidFill>
+              <a:srgbClr val="1565C0"/>
+            </a:solidFill>
+          </a:ln>
+        </p:spPr>
+        <p:style>
+          <a:lnRef idx="1">
+            <a:schemeClr val="accent1"/>
+          </a:lnRef>
+          <a:fillRef idx="3">
+            <a:schemeClr val="accent1"/>
+          </a:fillRef>
+          <a:effectRef idx="2">
+            <a:schemeClr val="accent1"/>
+          </a:effectRef>
+          <a:fontRef idx="minor">
+            <a:schemeClr val="lt1"/>
+          </a:fontRef>
+        </p:style>
+        <p:txBody>
+          <a:bodyPr wrap="square" lIns="50800" tIns="38100" rIns="50800" bIns="38100" rtlCol="0" anchor="ctr"/>
+          <a:lstStyle/>
+          <a:p>
+            <a:pPr algn="ctr"/>
+            <a:r>
+              <a:rPr sz="700" b="0">
+                <a:solidFill>
+                  <a:srgbClr val="424242"/>
+                </a:solidFill>
+              </a:rPr>
+              <a:t>Asthma TUE
+v9.3</a:t>
+            </a:r>
+          </a:p>
+        </p:txBody>
+      </p:sp>
+      <p:cxnSp>
+        <p:nvCxnSpPr>
+          <p:cNvPr id="36" name="Connector 35"/>
+          <p:cNvCxnSpPr/>
+          <p:nvPr/>
+        </p:nvCxnSpPr>
+        <p:spPr>
+          <a:xfrm>
+            <a:off x="9685020" y="1691640"/>
+            <a:ext cx="0" cy="1664208"/>
+          </a:xfrm>
+          <a:prstGeom prst="line">
+            <a:avLst/>
+          </a:prstGeom>
+          <a:ln w="9525">
+            <a:solidFill>
+              <a:srgbClr val="1565C0"/>
+            </a:solidFill>
+            <a:prstDash val="dash"/>
+          </a:ln>
+        </p:spPr>
+        <p:style>
+          <a:lnRef idx="2">
+            <a:schemeClr val="accent1"/>
+          </a:lnRef>
+          <a:fillRef idx="0">
+            <a:schemeClr val="accent1"/>
+          </a:fillRef>
+          <a:effectRef idx="1">
+            <a:schemeClr val="accent1"/>
+          </a:effectRef>
+          <a:fontRef idx="minor">
+            <a:schemeClr val="tx1"/>
+          </a:fontRef>
+        </p:style>
+      </p:cxnSp>
+      <p:sp>
+        <p:nvSpPr>
+          <p:cNvPr id="37" name="Rounded Rectangle 36"/>
+          <p:cNvSpPr/>
+          <p:nvPr/>
+        </p:nvSpPr>
+        <p:spPr>
+          <a:xfrm>
+            <a:off x="9231761" y="1828800"/>
+            <a:ext cx="1371600" cy="502920"/>
+          </a:xfrm>
+          <a:prstGeom prst="roundRect">
+            <a:avLst/>
+          </a:prstGeom>
+          <a:solidFill>
+            <a:srgbClr val="E3F2FD"/>
+          </a:solidFill>
+          <a:ln w="19050">
+            <a:solidFill>
+              <a:srgbClr val="1565C0"/>
+            </a:solidFill>
+          </a:ln>
+        </p:spPr>
+        <p:style>
+          <a:lnRef idx="1">
+            <a:schemeClr val="accent1"/>
+          </a:lnRef>
+          <a:fillRef idx="3">
+            <a:schemeClr val="accent1"/>
+          </a:fillRef>
+          <a:effectRef idx="2">
+            <a:schemeClr val="accent1"/>
+          </a:effectRef>
+          <a:fontRef idx="minor">
+            <a:schemeClr val="lt1"/>
+          </a:fontRef>
+        </p:style>
+        <p:txBody>
+          <a:bodyPr wrap="square" lIns="50800" tIns="38100" rIns="50800" bIns="38100" rtlCol="0" anchor="ctr"/>
+          <a:lstStyle/>
+          <a:p>
+            <a:pPr algn="ctr"/>
+            <a:r>
+              <a:rPr sz="700" b="0">
+                <a:solidFill>
+                  <a:srgbClr val="424242"/>
+                </a:solidFill>
+              </a:rPr>
+              <a:t>ADHD TUE
+v8.0</a:t>
+            </a:r>
+          </a:p>
+        </p:txBody>
+      </p:sp>
+      <p:cxnSp>
+        <p:nvCxnSpPr>
+          <p:cNvPr id="38" name="Connector 37"/>
+          <p:cNvCxnSpPr/>
+          <p:nvPr/>
+        </p:nvCxnSpPr>
+        <p:spPr>
+          <a:xfrm>
+            <a:off x="9685020" y="2331720"/>
+            <a:ext cx="0" cy="1024128"/>
+          </a:xfrm>
+          <a:prstGeom prst="line">
+            <a:avLst/>
+          </a:prstGeom>
+          <a:ln w="9525">
+            <a:solidFill>
+              <a:srgbClr val="1565C0"/>
+            </a:solidFill>
+            <a:prstDash val="dash"/>
+          </a:ln>
+        </p:spPr>
+        <p:style>
+          <a:lnRef idx="2">
+            <a:schemeClr val="accent1"/>
+          </a:lnRef>
+          <a:fillRef idx="0">
+            <a:schemeClr val="accent1"/>
+          </a:fillRef>
+          <a:effectRef idx="1">
+            <a:schemeClr val="accent1"/>
+          </a:effectRef>
+          <a:fontRef idx="minor">
+            <a:schemeClr val="tx1"/>
+          </a:fontRef>
+        </p:style>
+      </p:cxnSp>
+      <p:sp>
+        <p:nvSpPr>
+          <p:cNvPr id="39" name="TextBox 38"/>
+          <p:cNvSpPr txBox="1"/>
+          <p:nvPr/>
+        </p:nvSpPr>
+        <p:spPr>
+          <a:xfrm>
+            <a:off x="1336653" y="5120640"/>
+            <a:ext cx="1188720" cy="640080"/>
+          </a:xfrm>
+          <a:prstGeom prst="rect">
+            <a:avLst/>
+          </a:prstGeom>
+          <a:noFill/>
+        </p:spPr>
+        <p:txBody>
+          <a:bodyPr wrap="square">
+            <a:spAutoFit/>
+          </a:bodyPr>
+          <a:lstStyle/>
+          <a:p>
+            <a:pPr algn="ctr"/>
+            <a:r>
+              <a:rPr sz="900" b="1" i="0" dirty="0">
+                <a:solidFill>
+                  <a:srgbClr val="2E7D32"/>
+                </a:solidFill>
+              </a:rPr>
+              <a:t>Clinical
+Guideline
+Updates</a:t>
+            </a:r>
+          </a:p>
+        </p:txBody>
+      </p:sp>
+      <p:sp>
+        <p:nvSpPr>
+          <p:cNvPr id="40" name="Rounded Rectangle 39"/>
+          <p:cNvSpPr/>
+          <p:nvPr/>
+        </p:nvSpPr>
+        <p:spPr>
+          <a:xfrm>
+            <a:off x="1417320" y="4114800"/>
+            <a:ext cx="1371600" cy="502920"/>
+          </a:xfrm>
+          <a:prstGeom prst="roundRect">
+            <a:avLst/>
+          </a:prstGeom>
+          <a:solidFill>
+            <a:srgbClr val="E8F5E9"/>
+          </a:solidFill>
+          <a:ln w="19050">
+            <a:solidFill>
+              <a:srgbClr val="2E7D32"/>
+            </a:solidFill>
+          </a:ln>
+        </p:spPr>
+        <p:style>
+          <a:lnRef idx="1">
+            <a:schemeClr val="accent1"/>
+          </a:lnRef>
+          <a:fillRef idx="3">
+            <a:schemeClr val="accent1"/>
+          </a:fillRef>
+          <a:effectRef idx="2">
+            <a:schemeClr val="accent1"/>
+          </a:effectRef>
+          <a:fontRef idx="minor">
+            <a:schemeClr val="lt1"/>
+          </a:fontRef>
+        </p:style>
+        <p:txBody>
+          <a:bodyPr wrap="square" lIns="50800" tIns="38100" rIns="50800" bIns="38100" rtlCol="0" anchor="ctr"/>
+          <a:lstStyle/>
+          <a:p>
+            <a:pPr algn="ctr"/>
+            <a:r>
+              <a:rPr sz="700" b="0">
+                <a:solidFill>
+                  <a:srgbClr val="424242"/>
+                </a:solidFill>
+              </a:rPr>
+              <a:t>Endocrine Soc.
+Testosterone GL</a:t>
+            </a:r>
+          </a:p>
+        </p:txBody>
+      </p:sp>
+      <p:cxnSp>
+        <p:nvCxnSpPr>
+          <p:cNvPr id="41" name="Connector 40"/>
+          <p:cNvCxnSpPr/>
+          <p:nvPr/>
+        </p:nvCxnSpPr>
+        <p:spPr>
+          <a:xfrm>
+            <a:off x="2057400" y="3502152"/>
+            <a:ext cx="0" cy="612648"/>
+          </a:xfrm>
+          <a:prstGeom prst="line">
+            <a:avLst/>
+          </a:prstGeom>
+          <a:ln w="9525">
+            <a:solidFill>
+              <a:srgbClr val="2E7D32"/>
+            </a:solidFill>
+            <a:prstDash val="dash"/>
+          </a:ln>
+        </p:spPr>
+        <p:style>
+          <a:lnRef idx="2">
+            <a:schemeClr val="accent1"/>
+          </a:lnRef>
+          <a:fillRef idx="0">
+            <a:schemeClr val="accent1"/>
+          </a:fillRef>
+          <a:effectRef idx="1">
+            <a:schemeClr val="accent1"/>
+          </a:effectRef>
+          <a:fontRef idx="minor">
+            <a:schemeClr val="tx1"/>
+          </a:fontRef>
+        </p:style>
+      </p:cxnSp>
+      <p:sp>
+        <p:nvSpPr>
+          <p:cNvPr id="42" name="Rounded Rectangle 41"/>
+          <p:cNvSpPr/>
+          <p:nvPr/>
+        </p:nvSpPr>
+        <p:spPr>
+          <a:xfrm>
+            <a:off x="5021580" y="4754880"/>
+            <a:ext cx="1371600" cy="502920"/>
+          </a:xfrm>
+          <a:prstGeom prst="roundRect">
+            <a:avLst/>
+          </a:prstGeom>
+          <a:solidFill>
+            <a:srgbClr val="E8F5E9"/>
+          </a:solidFill>
+          <a:ln w="19050">
+            <a:solidFill>
+              <a:srgbClr val="2E7D32"/>
+            </a:solidFill>
+          </a:ln>
+        </p:spPr>
+        <p:style>
+          <a:lnRef idx="1">
+            <a:schemeClr val="accent1"/>
+          </a:lnRef>
+          <a:fillRef idx="3">
+            <a:schemeClr val="accent1"/>
+          </a:fillRef>
+          <a:effectRef idx="2">
+            <a:schemeClr val="accent1"/>
+          </a:effectRef>
+          <a:fontRef idx="minor">
+            <a:schemeClr val="lt1"/>
+          </a:fontRef>
+        </p:style>
+        <p:txBody>
+          <a:bodyPr wrap="square" lIns="50800" tIns="38100" rIns="50800" bIns="38100" rtlCol="0" anchor="ctr"/>
+          <a:lstStyle/>
+          <a:p>
+            <a:pPr algn="ctr"/>
+            <a:r>
+              <a:rPr sz="700" b="0">
+                <a:solidFill>
+                  <a:srgbClr val="424242"/>
+                </a:solidFill>
+              </a:rPr>
+              <a:t>Australian
+ADHD GL</a:t>
+            </a:r>
+          </a:p>
+        </p:txBody>
+      </p:sp>
+      <p:cxnSp>
+        <p:nvCxnSpPr>
+          <p:cNvPr id="43" name="Connector 42"/>
+          <p:cNvCxnSpPr/>
+          <p:nvPr/>
+        </p:nvCxnSpPr>
+        <p:spPr>
+          <a:xfrm>
+            <a:off x="5661660" y="3502152"/>
+            <a:ext cx="0" cy="1252728"/>
+          </a:xfrm>
+          <a:prstGeom prst="line">
+            <a:avLst/>
+          </a:prstGeom>
+          <a:ln w="9525">
+            <a:solidFill>
+              <a:srgbClr val="2E7D32"/>
+            </a:solidFill>
+            <a:prstDash val="dash"/>
+          </a:ln>
+        </p:spPr>
+        <p:style>
+          <a:lnRef idx="2">
+            <a:schemeClr val="accent1"/>
+          </a:lnRef>
+          <a:fillRef idx="0">
+            <a:schemeClr val="accent1"/>
+          </a:fillRef>
+          <a:effectRef idx="1">
+            <a:schemeClr val="accent1"/>
+          </a:effectRef>
+          <a:fontRef idx="minor">
+            <a:schemeClr val="tx1"/>
+          </a:fontRef>
+        </p:style>
+      </p:cxnSp>
+      <p:sp>
+        <p:nvSpPr>
+          <p:cNvPr id="44" name="Rounded Rectangle 43"/>
+          <p:cNvSpPr/>
+          <p:nvPr/>
+        </p:nvSpPr>
+        <p:spPr>
+          <a:xfrm>
+            <a:off x="5844540" y="5399635"/>
+            <a:ext cx="1371600" cy="502920"/>
+          </a:xfrm>
+          <a:prstGeom prst="roundRect">
+            <a:avLst/>
+          </a:prstGeom>
+          <a:solidFill>
+            <a:srgbClr val="E8F5E9"/>
+          </a:solidFill>
+          <a:ln w="19050">
+            <a:solidFill>
+              <a:srgbClr val="2E7D32"/>
+            </a:solidFill>
+          </a:ln>
+        </p:spPr>
+        <p:style>
+          <a:lnRef idx="1">
+            <a:schemeClr val="accent1"/>
+          </a:lnRef>
+          <a:fillRef idx="3">
+            <a:schemeClr val="accent1"/>
+          </a:fillRef>
+          <a:effectRef idx="2">
+            <a:schemeClr val="accent1"/>
+          </a:effectRef>
+          <a:fontRef idx="minor">
+            <a:schemeClr val="lt1"/>
+          </a:fontRef>
+        </p:style>
+        <p:txBody>
+          <a:bodyPr wrap="square" lIns="50800" tIns="38100" rIns="50800" bIns="38100" rtlCol="0" anchor="ctr"/>
+          <a:lstStyle/>
+          <a:p>
+            <a:pPr algn="ctr"/>
+            <a:r>
+              <a:rPr sz="700" b="0">
+                <a:solidFill>
+                  <a:srgbClr val="424242"/>
+                </a:solidFill>
+              </a:rPr>
+              <a:t>PMOS Intl.
+GL revised</a:t>
+            </a:r>
+          </a:p>
+        </p:txBody>
+      </p:sp>
+      <p:cxnSp>
+        <p:nvCxnSpPr>
+          <p:cNvPr id="45" name="Connector 44"/>
+          <p:cNvCxnSpPr/>
+          <p:nvPr/>
+        </p:nvCxnSpPr>
+        <p:spPr>
+          <a:xfrm>
+            <a:off x="7086600" y="3502152"/>
+            <a:ext cx="0" cy="1892808"/>
+          </a:xfrm>
+          <a:prstGeom prst="line">
+            <a:avLst/>
+          </a:prstGeom>
+          <a:ln w="9525">
+            <a:solidFill>
+              <a:srgbClr val="2E7D32"/>
+            </a:solidFill>
+            <a:prstDash val="dash"/>
+          </a:ln>
+        </p:spPr>
+        <p:style>
+          <a:lnRef idx="2">
+            <a:schemeClr val="accent1"/>
+          </a:lnRef>
+          <a:fillRef idx="0">
+            <a:schemeClr val="accent1"/>
+          </a:fillRef>
+          <a:effectRef idx="1">
+            <a:schemeClr val="accent1"/>
+          </a:effectRef>
+          <a:fontRef idx="minor">
+            <a:schemeClr val="tx1"/>
+          </a:fontRef>
+        </p:style>
+      </p:cxnSp>
+      <p:sp>
+        <p:nvSpPr>
+          <p:cNvPr id="46" name="Rounded Rectangle 45"/>
+          <p:cNvSpPr/>
+          <p:nvPr/>
+        </p:nvSpPr>
+        <p:spPr>
+          <a:xfrm>
+            <a:off x="5952744" y="4101766"/>
+            <a:ext cx="1371600" cy="502920"/>
+          </a:xfrm>
+          <a:prstGeom prst="roundRect">
+            <a:avLst/>
+          </a:prstGeom>
+          <a:solidFill>
+            <a:srgbClr val="E8F5E9"/>
+          </a:solidFill>
+          <a:ln w="19050">
+            <a:solidFill>
+              <a:srgbClr val="2E7D32"/>
+            </a:solidFill>
+          </a:ln>
+        </p:spPr>
+        <p:style>
+          <a:lnRef idx="1">
+            <a:schemeClr val="accent1"/>
+          </a:lnRef>
+          <a:fillRef idx="3">
+            <a:schemeClr val="accent1"/>
+          </a:fillRef>
+          <a:effectRef idx="2">
+            <a:schemeClr val="accent1"/>
+          </a:effectRef>
+          <a:fontRef idx="minor">
+            <a:schemeClr val="lt1"/>
+          </a:fontRef>
+        </p:style>
+        <p:txBody>
+          <a:bodyPr wrap="square" lIns="50800" tIns="38100" rIns="50800" bIns="38100" rtlCol="0" anchor="ctr"/>
+          <a:lstStyle/>
+          <a:p>
+            <a:pPr algn="ctr"/>
+            <a:r>
+              <a:rPr sz="700" b="0">
+                <a:solidFill>
+                  <a:srgbClr val="424242"/>
+                </a:solidFill>
+              </a:rPr>
+              <a:t>TRAVERSE trial
+(TRT safety)</a:t>
+            </a:r>
+          </a:p>
+        </p:txBody>
+      </p:sp>
+      <p:cxnSp>
+        <p:nvCxnSpPr>
+          <p:cNvPr id="47" name="Connector 46"/>
+          <p:cNvCxnSpPr/>
+          <p:nvPr/>
+        </p:nvCxnSpPr>
+        <p:spPr>
+          <a:xfrm>
+            <a:off x="7254240" y="3502152"/>
+            <a:ext cx="0" cy="612648"/>
+          </a:xfrm>
+          <a:prstGeom prst="line">
+            <a:avLst/>
+          </a:prstGeom>
+          <a:ln w="9525">
+            <a:solidFill>
+              <a:srgbClr val="2E7D32"/>
+            </a:solidFill>
+            <a:prstDash val="dash"/>
+          </a:ln>
+        </p:spPr>
+        <p:style>
+          <a:lnRef idx="2">
+            <a:schemeClr val="accent1"/>
+          </a:lnRef>
+          <a:fillRef idx="0">
+            <a:schemeClr val="accent1"/>
+          </a:fillRef>
+          <a:effectRef idx="1">
+            <a:schemeClr val="accent1"/>
+          </a:effectRef>
+          <a:fontRef idx="minor">
+            <a:schemeClr val="tx1"/>
+          </a:fontRef>
+        </p:style>
+      </p:cxnSp>
+      <p:sp>
+        <p:nvSpPr>
+          <p:cNvPr id="48" name="Rounded Rectangle 47"/>
+          <p:cNvSpPr/>
+          <p:nvPr/>
+        </p:nvSpPr>
+        <p:spPr>
+          <a:xfrm>
+            <a:off x="6781800" y="4754880"/>
+            <a:ext cx="1371600" cy="502920"/>
+          </a:xfrm>
+          <a:prstGeom prst="roundRect">
+            <a:avLst/>
+          </a:prstGeom>
+          <a:solidFill>
+            <a:srgbClr val="E8F5E9"/>
+          </a:solidFill>
+          <a:ln w="19050">
+            <a:solidFill>
+              <a:srgbClr val="2E7D32"/>
+            </a:solidFill>
+          </a:ln>
+        </p:spPr>
+        <p:style>
+          <a:lnRef idx="1">
+            <a:schemeClr val="accent1"/>
+          </a:lnRef>
+          <a:fillRef idx="3">
+            <a:schemeClr val="accent1"/>
+          </a:fillRef>
+          <a:effectRef idx="2">
+            <a:schemeClr val="accent1"/>
+          </a:effectRef>
+          <a:fontRef idx="minor">
+            <a:schemeClr val="lt1"/>
+          </a:fontRef>
+        </p:style>
+        <p:txBody>
+          <a:bodyPr wrap="square" lIns="50800" tIns="38100" rIns="50800" bIns="38100" rtlCol="0" anchor="ctr"/>
+          <a:lstStyle/>
+          <a:p>
+            <a:pPr algn="ctr"/>
+            <a:r>
+              <a:rPr sz="700" b="0">
+                <a:solidFill>
+                  <a:srgbClr val="424242"/>
+                </a:solidFill>
+              </a:rPr>
+              <a:t>ESC/ESH
+Hypertension GL</a:t>
+            </a:r>
+          </a:p>
+        </p:txBody>
+      </p:sp>
+      <p:cxnSp>
+        <p:nvCxnSpPr>
+          <p:cNvPr id="49" name="Connector 48"/>
+          <p:cNvCxnSpPr/>
+          <p:nvPr/>
+        </p:nvCxnSpPr>
+        <p:spPr>
+          <a:xfrm>
+            <a:off x="7421880" y="3502152"/>
+            <a:ext cx="0" cy="1252728"/>
+          </a:xfrm>
+          <a:prstGeom prst="line">
+            <a:avLst/>
+          </a:prstGeom>
+          <a:ln w="9525">
+            <a:solidFill>
+              <a:srgbClr val="2E7D32"/>
+            </a:solidFill>
+            <a:prstDash val="dash"/>
+          </a:ln>
+        </p:spPr>
+        <p:style>
+          <a:lnRef idx="2">
+            <a:schemeClr val="accent1"/>
+          </a:lnRef>
+          <a:fillRef idx="0">
+            <a:schemeClr val="accent1"/>
+          </a:fillRef>
+          <a:effectRef idx="1">
+            <a:schemeClr val="accent1"/>
+          </a:effectRef>
+          <a:fontRef idx="minor">
+            <a:schemeClr val="tx1"/>
+          </a:fontRef>
+        </p:style>
+      </p:cxnSp>
+      <p:sp>
+        <p:nvSpPr>
+          <p:cNvPr id="50" name="Rounded Rectangle 49"/>
+          <p:cNvSpPr/>
+          <p:nvPr/>
+        </p:nvSpPr>
+        <p:spPr>
+          <a:xfrm>
+            <a:off x="7315200" y="5399635"/>
+            <a:ext cx="1371600" cy="502920"/>
+          </a:xfrm>
+          <a:prstGeom prst="roundRect">
+            <a:avLst/>
+          </a:prstGeom>
+          <a:solidFill>
+            <a:srgbClr val="E8F5E9"/>
+          </a:solidFill>
+          <a:ln w="19050">
+            <a:solidFill>
+              <a:srgbClr val="2E7D32"/>
+            </a:solidFill>
+          </a:ln>
+        </p:spPr>
+        <p:style>
+          <a:lnRef idx="1">
+            <a:schemeClr val="accent1"/>
+          </a:lnRef>
+          <a:fillRef idx="3">
+            <a:schemeClr val="accent1"/>
+          </a:fillRef>
+          <a:effectRef idx="2">
+            <a:schemeClr val="accent1"/>
+          </a:effectRef>
+          <a:fontRef idx="minor">
+            <a:schemeClr val="lt1"/>
+          </a:fontRef>
+        </p:style>
+        <p:txBody>
+          <a:bodyPr wrap="square" lIns="50800" tIns="38100" rIns="50800" bIns="38100" rtlCol="0" anchor="ctr"/>
+          <a:lstStyle/>
+          <a:p>
+            <a:pPr algn="ctr"/>
+            <a:r>
+              <a:rPr sz="700" b="0">
+                <a:solidFill>
+                  <a:srgbClr val="424242"/>
+                </a:solidFill>
+              </a:rPr>
+              <a:t>EAU Sexual/
+Reprod. Health</a:t>
+            </a:r>
+          </a:p>
+        </p:txBody>
+      </p:sp>
+      <p:cxnSp>
+        <p:nvCxnSpPr>
+          <p:cNvPr id="51" name="Connector 50"/>
+          <p:cNvCxnSpPr/>
+          <p:nvPr/>
+        </p:nvCxnSpPr>
+        <p:spPr>
+          <a:xfrm>
+            <a:off x="7673340" y="3502152"/>
+            <a:ext cx="0" cy="1892808"/>
+          </a:xfrm>
+          <a:prstGeom prst="line">
+            <a:avLst/>
+          </a:prstGeom>
+          <a:ln w="9525">
+            <a:solidFill>
+              <a:srgbClr val="2E7D32"/>
+            </a:solidFill>
+            <a:prstDash val="dash"/>
+          </a:ln>
+        </p:spPr>
+        <p:style>
+          <a:lnRef idx="2">
+            <a:schemeClr val="accent1"/>
+          </a:lnRef>
+          <a:fillRef idx="0">
+            <a:schemeClr val="accent1"/>
+          </a:fillRef>
+          <a:effectRef idx="1">
+            <a:schemeClr val="accent1"/>
+          </a:effectRef>
+          <a:fontRef idx="minor">
+            <a:schemeClr val="tx1"/>
+          </a:fontRef>
+        </p:style>
+      </p:cxnSp>
+      <p:sp>
+        <p:nvSpPr>
+          <p:cNvPr id="52" name="Rounded Rectangle 51"/>
+          <p:cNvSpPr/>
+          <p:nvPr/>
+        </p:nvSpPr>
+        <p:spPr>
+          <a:xfrm>
+            <a:off x="7499972" y="4119475"/>
+            <a:ext cx="1371600" cy="502920"/>
+          </a:xfrm>
+          <a:prstGeom prst="roundRect">
+            <a:avLst/>
+          </a:prstGeom>
+          <a:solidFill>
+            <a:srgbClr val="E8F5E9"/>
+          </a:solidFill>
+          <a:ln w="19050">
+            <a:solidFill>
+              <a:srgbClr val="2E7D32"/>
+            </a:solidFill>
+          </a:ln>
+        </p:spPr>
+        <p:style>
+          <a:lnRef idx="1">
+            <a:schemeClr val="accent1"/>
+          </a:lnRef>
+          <a:fillRef idx="3">
+            <a:schemeClr val="accent1"/>
+          </a:fillRef>
+          <a:effectRef idx="2">
+            <a:schemeClr val="accent1"/>
+          </a:effectRef>
+          <a:fontRef idx="minor">
+            <a:schemeClr val="lt1"/>
+          </a:fontRef>
+        </p:style>
+        <p:txBody>
+          <a:bodyPr wrap="square" lIns="50800" tIns="38100" rIns="50800" bIns="38100" rtlCol="0" anchor="ctr"/>
+          <a:lstStyle/>
+          <a:p>
+            <a:pPr algn="ctr"/>
+            <a:r>
+              <a:rPr sz="700" b="0">
+                <a:solidFill>
+                  <a:srgbClr val="424242"/>
+                </a:solidFill>
+              </a:rPr>
+              <a:t>NICE ADHD
+GL update</a:t>
+            </a:r>
+          </a:p>
+        </p:txBody>
+      </p:sp>
+      <p:cxnSp>
+        <p:nvCxnSpPr>
+          <p:cNvPr id="53" name="Connector 52"/>
+          <p:cNvCxnSpPr/>
+          <p:nvPr/>
+        </p:nvCxnSpPr>
+        <p:spPr>
+          <a:xfrm>
+            <a:off x="8092440" y="3502152"/>
+            <a:ext cx="0" cy="612648"/>
+          </a:xfrm>
+          <a:prstGeom prst="line">
+            <a:avLst/>
+          </a:prstGeom>
+          <a:ln w="9525">
+            <a:solidFill>
+              <a:srgbClr val="2E7D32"/>
+            </a:solidFill>
+            <a:prstDash val="dash"/>
+          </a:ln>
+        </p:spPr>
+        <p:style>
+          <a:lnRef idx="2">
+            <a:schemeClr val="accent1"/>
+          </a:lnRef>
+          <a:fillRef idx="0">
+            <a:schemeClr val="accent1"/>
+          </a:fillRef>
+          <a:effectRef idx="1">
+            <a:schemeClr val="accent1"/>
+          </a:effectRef>
+          <a:fontRef idx="minor">
+            <a:schemeClr val="tx1"/>
+          </a:fontRef>
+        </p:style>
+      </p:cxnSp>
+      <p:sp>
+        <p:nvSpPr>
+          <p:cNvPr id="54" name="Rounded Rectangle 53"/>
+          <p:cNvSpPr/>
+          <p:nvPr/>
+        </p:nvSpPr>
+        <p:spPr>
+          <a:xfrm>
+            <a:off x="8295027" y="4754880"/>
+            <a:ext cx="1371600" cy="502920"/>
+          </a:xfrm>
+          <a:prstGeom prst="roundRect">
+            <a:avLst/>
+          </a:prstGeom>
+          <a:solidFill>
+            <a:srgbClr val="E8F5E9"/>
+          </a:solidFill>
+          <a:ln w="19050">
+            <a:solidFill>
+              <a:srgbClr val="2E7D32"/>
+            </a:solidFill>
+          </a:ln>
+        </p:spPr>
+        <p:style>
+          <a:lnRef idx="1">
+            <a:schemeClr val="accent1"/>
+          </a:lnRef>
+          <a:fillRef idx="3">
+            <a:schemeClr val="accent1"/>
+          </a:fillRef>
+          <a:effectRef idx="2">
+            <a:schemeClr val="accent1"/>
+          </a:effectRef>
+          <a:fontRef idx="minor">
+            <a:schemeClr val="lt1"/>
+          </a:fontRef>
+        </p:style>
+        <p:txBody>
+          <a:bodyPr wrap="square" lIns="50800" tIns="38100" rIns="50800" bIns="38100" rtlCol="0" anchor="ctr"/>
+          <a:lstStyle/>
+          <a:p>
+            <a:pPr algn="ctr"/>
+            <a:r>
+              <a:rPr sz="700" b="0">
+                <a:solidFill>
+                  <a:srgbClr val="424242"/>
+                </a:solidFill>
+              </a:rPr>
+              <a:t>ADA Diabetes
+Standards 2025</a:t>
+            </a:r>
+          </a:p>
+        </p:txBody>
+      </p:sp>
+      <p:cxnSp>
+        <p:nvCxnSpPr>
+          <p:cNvPr id="55" name="Connector 54"/>
+          <p:cNvCxnSpPr/>
+          <p:nvPr/>
+        </p:nvCxnSpPr>
+        <p:spPr>
+          <a:xfrm>
+            <a:off x="8679180" y="3502152"/>
+            <a:ext cx="0" cy="1252728"/>
+          </a:xfrm>
+          <a:prstGeom prst="line">
+            <a:avLst/>
+          </a:prstGeom>
+          <a:ln w="9525">
+            <a:solidFill>
+              <a:srgbClr val="2E7D32"/>
+            </a:solidFill>
+            <a:prstDash val="dash"/>
+          </a:ln>
+        </p:spPr>
+        <p:style>
+          <a:lnRef idx="2">
+            <a:schemeClr val="accent1"/>
+          </a:lnRef>
+          <a:fillRef idx="0">
+            <a:schemeClr val="accent1"/>
+          </a:fillRef>
+          <a:effectRef idx="1">
+            <a:schemeClr val="accent1"/>
+          </a:effectRef>
+          <a:fontRef idx="minor">
+            <a:schemeClr val="tx1"/>
+          </a:fontRef>
+        </p:style>
+      </p:cxnSp>
+      <p:sp>
+        <p:nvSpPr>
+          <p:cNvPr id="56" name="Rounded Rectangle 55"/>
+          <p:cNvSpPr/>
+          <p:nvPr/>
+        </p:nvSpPr>
+        <p:spPr>
+          <a:xfrm>
+            <a:off x="8785860" y="5394960"/>
+            <a:ext cx="1371600" cy="502920"/>
+          </a:xfrm>
+          <a:prstGeom prst="roundRect">
+            <a:avLst/>
+          </a:prstGeom>
+          <a:solidFill>
+            <a:srgbClr val="E8F5E9"/>
+          </a:solidFill>
+          <a:ln w="19050">
+            <a:solidFill>
+              <a:srgbClr val="2E7D32"/>
+            </a:solidFill>
+          </a:ln>
+        </p:spPr>
+        <p:style>
+          <a:lnRef idx="1">
+            <a:schemeClr val="accent1"/>
+          </a:lnRef>
+          <a:fillRef idx="3">
+            <a:schemeClr val="accent1"/>
+          </a:fillRef>
+          <a:effectRef idx="2">
+            <a:schemeClr val="accent1"/>
+          </a:effectRef>
+          <a:fontRef idx="minor">
+            <a:schemeClr val="lt1"/>
+          </a:fontRef>
+        </p:style>
+        <p:txBody>
+          <a:bodyPr wrap="square" lIns="50800" tIns="38100" rIns="50800" bIns="38100" rtlCol="0" anchor="ctr"/>
+          <a:lstStyle/>
+          <a:p>
+            <a:pPr algn="ctr"/>
+            <a:r>
+              <a:rPr sz="700" b="0">
+                <a:solidFill>
+                  <a:srgbClr val="424242"/>
+                </a:solidFill>
+              </a:rPr>
+              <a:t>GINA 2025
+Asthma Strategy</a:t>
+            </a:r>
+          </a:p>
+        </p:txBody>
+      </p:sp>
+      <p:cxnSp>
+        <p:nvCxnSpPr>
+          <p:cNvPr id="57" name="Connector 56"/>
+          <p:cNvCxnSpPr/>
+          <p:nvPr/>
+        </p:nvCxnSpPr>
+        <p:spPr>
+          <a:xfrm>
+            <a:off x="9014460" y="3502152"/>
+            <a:ext cx="0" cy="1892808"/>
+          </a:xfrm>
+          <a:prstGeom prst="line">
+            <a:avLst/>
+          </a:prstGeom>
+          <a:ln w="9525">
+            <a:solidFill>
+              <a:srgbClr val="2E7D32"/>
+            </a:solidFill>
+            <a:prstDash val="dash"/>
+          </a:ln>
+        </p:spPr>
+        <p:style>
+          <a:lnRef idx="2">
+            <a:schemeClr val="accent1"/>
+          </a:lnRef>
+          <a:fillRef idx="0">
+            <a:schemeClr val="accent1"/>
+          </a:fillRef>
+          <a:effectRef idx="1">
+            <a:schemeClr val="accent1"/>
+          </a:effectRef>
+          <a:fontRef idx="minor">
+            <a:schemeClr val="tx1"/>
+          </a:fontRef>
+        </p:style>
+      </p:cxnSp>
+      <p:sp>
+        <p:nvSpPr>
+          <p:cNvPr id="58" name="Rounded Rectangle 57"/>
+          <p:cNvSpPr/>
+          <p:nvPr/>
+        </p:nvSpPr>
+        <p:spPr>
+          <a:xfrm>
+            <a:off x="9060180" y="4119475"/>
+            <a:ext cx="1371600" cy="502920"/>
+          </a:xfrm>
+          <a:prstGeom prst="roundRect">
+            <a:avLst/>
+          </a:prstGeom>
+          <a:solidFill>
+            <a:srgbClr val="E8F5E9"/>
+          </a:solidFill>
+          <a:ln w="19050">
+            <a:solidFill>
+              <a:srgbClr val="2E7D32"/>
+            </a:solidFill>
+          </a:ln>
+        </p:spPr>
+        <p:style>
+          <a:lnRef idx="1">
+            <a:schemeClr val="accent1"/>
+          </a:lnRef>
+          <a:fillRef idx="3">
+            <a:schemeClr val="accent1"/>
+          </a:fillRef>
+          <a:effectRef idx="2">
+            <a:schemeClr val="accent1"/>
+          </a:effectRef>
+          <a:fontRef idx="minor">
+            <a:schemeClr val="lt1"/>
+          </a:fontRef>
+        </p:style>
+        <p:txBody>
+          <a:bodyPr wrap="square" lIns="50800" tIns="38100" rIns="50800" bIns="38100" rtlCol="0" anchor="ctr"/>
+          <a:lstStyle/>
+          <a:p>
+            <a:pPr algn="ctr"/>
+            <a:r>
+              <a:rPr sz="700" b="0">
+                <a:solidFill>
+                  <a:srgbClr val="424242"/>
+                </a:solidFill>
+              </a:rPr>
+              <a:t>ESC Heart
+Failure GL</a:t>
+            </a:r>
+          </a:p>
+        </p:txBody>
+      </p:sp>
+      <p:cxnSp>
+        <p:nvCxnSpPr>
+          <p:cNvPr id="59" name="Connector 58"/>
+          <p:cNvCxnSpPr/>
+          <p:nvPr/>
+        </p:nvCxnSpPr>
+        <p:spPr>
+          <a:xfrm>
+            <a:off x="9098280" y="3502152"/>
+            <a:ext cx="0" cy="612648"/>
+          </a:xfrm>
+          <a:prstGeom prst="line">
+            <a:avLst/>
+          </a:prstGeom>
+          <a:ln w="9525">
+            <a:solidFill>
+              <a:srgbClr val="2E7D32"/>
+            </a:solidFill>
+            <a:prstDash val="dash"/>
+          </a:ln>
+        </p:spPr>
+        <p:style>
+          <a:lnRef idx="2">
+            <a:schemeClr val="accent1"/>
+          </a:lnRef>
+          <a:fillRef idx="0">
+            <a:schemeClr val="accent1"/>
+          </a:fillRef>
+          <a:effectRef idx="1">
+            <a:schemeClr val="accent1"/>
+          </a:effectRef>
+          <a:fontRef idx="minor">
+            <a:schemeClr val="tx1"/>
+          </a:fontRef>
+        </p:style>
+      </p:cxnSp>
+      <p:cxnSp>
+        <p:nvCxnSpPr>
+          <p:cNvPr id="60" name="Connector 59"/>
+          <p:cNvCxnSpPr/>
+          <p:nvPr/>
+        </p:nvCxnSpPr>
+        <p:spPr>
+          <a:xfrm flipV="1">
+            <a:off x="10515600" y="2926080"/>
+            <a:ext cx="0" cy="274320"/>
+          </a:xfrm>
+          <a:prstGeom prst="line">
+            <a:avLst/>
+          </a:prstGeom>
+          <a:ln w="19050">
+            <a:solidFill>
+              <a:srgbClr val="C62828"/>
+            </a:solidFill>
+            <a:tailEnd type="triangle" w="med" len="med"/>
+          </a:ln>
+        </p:spPr>
+        <p:style>
+          <a:lnRef idx="2">
+            <a:schemeClr val="accent1"/>
+          </a:lnRef>
+          <a:fillRef idx="0">
+            <a:schemeClr val="accent1"/>
+          </a:fillRef>
+          <a:effectRef idx="1">
+            <a:schemeClr val="accent1"/>
+          </a:effectRef>
+          <a:fontRef idx="minor">
+            <a:schemeClr val="tx1"/>
+          </a:fontRef>
+        </p:style>
+      </p:cxnSp>
+      <p:cxnSp>
+        <p:nvCxnSpPr>
+          <p:cNvPr id="61" name="Connector 60"/>
+          <p:cNvCxnSpPr/>
+          <p:nvPr/>
+        </p:nvCxnSpPr>
+        <p:spPr>
+          <a:xfrm>
+            <a:off x="10515600" y="3657600"/>
+            <a:ext cx="0" cy="274320"/>
+          </a:xfrm>
+          <a:prstGeom prst="line">
+            <a:avLst/>
+          </a:prstGeom>
+          <a:ln w="19050">
+            <a:solidFill>
+              <a:srgbClr val="C62828"/>
+            </a:solidFill>
+            <a:tailEnd type="triangle" w="med" len="med"/>
+          </a:ln>
+        </p:spPr>
+        <p:style>
+          <a:lnRef idx="2">
+            <a:schemeClr val="accent1"/>
+          </a:lnRef>
+          <a:fillRef idx="0">
+            <a:schemeClr val="accent1"/>
+          </a:fillRef>
+          <a:effectRef idx="1">
+            <a:schemeClr val="accent1"/>
+          </a:effectRef>
+          <a:fontRef idx="minor">
+            <a:schemeClr val="tx1"/>
+          </a:fontRef>
+        </p:style>
+      </p:cxnSp>
+      <p:sp>
+        <p:nvSpPr>
+          <p:cNvPr id="62" name="TextBox 61"/>
+          <p:cNvSpPr txBox="1"/>
+          <p:nvPr/>
+        </p:nvSpPr>
+        <p:spPr>
+          <a:xfrm>
+            <a:off x="10157460" y="3191256"/>
+            <a:ext cx="731520" cy="365760"/>
+          </a:xfrm>
+          <a:prstGeom prst="rect">
+            <a:avLst/>
+          </a:prstGeom>
+          <a:noFill/>
+        </p:spPr>
+        <p:txBody>
+          <a:bodyPr wrap="square">
+            <a:spAutoFit/>
+          </a:bodyPr>
+          <a:lstStyle/>
+          <a:p>
+            <a:pPr algn="ctr"/>
+            <a:r>
+              <a:rPr sz="1200" b="1" i="0" dirty="0">
+                <a:solidFill>
+                  <a:srgbClr val="C62828"/>
+                </a:solidFill>
+              </a:rPr>
+              <a:t>GAP</a:t>
             </a:r>
           </a:p>
         </p:txBody>
